--- a/Морской бой на C++.pptx
+++ b/Морской бой на C++.pptx
@@ -6,7 +6,9 @@
   </p:sldMasterIdLst>
   <p:sldIdLst>
     <p:sldId id="256" r:id="rId2"/>
-    <p:sldId id="257" r:id="rId3"/>
+    <p:sldId id="258" r:id="rId3"/>
+    <p:sldId id="257" r:id="rId4"/>
+    <p:sldId id="259" r:id="rId5"/>
   </p:sldIdLst>
   <p:sldSz cx="12192000" cy="6858000"/>
   <p:notesSz cx="6858000" cy="9144000"/>
@@ -108,7 +110,7 @@
   <p:extLst>
     <p:ext uri="{EFAFB233-063F-42B5-8137-9DF3F51BA10A}">
       <p15:sldGuideLst xmlns:p15="http://schemas.microsoft.com/office/powerpoint/2012/main">
-        <p15:guide id="1" orient="horz" pos="2160" userDrawn="1">
+        <p15:guide id="1" orient="horz" pos="1366" userDrawn="1">
           <p15:clr>
             <a:srgbClr val="A4A3A4"/>
           </p15:clr>
@@ -255,7 +257,7 @@
           <a:p>
             <a:fld id="{32A15000-9175-4FB8-9666-11C5E7BD8C8A}" type="datetimeFigureOut">
               <a:rPr lang="ru-RU" smtClean="0"/>
-              <a:t>12.03.2026</a:t>
+              <a:t>13.03.2026</a:t>
             </a:fld>
             <a:endParaRPr lang="ru-RU"/>
           </a:p>
@@ -425,7 +427,7 @@
           <a:p>
             <a:fld id="{32A15000-9175-4FB8-9666-11C5E7BD8C8A}" type="datetimeFigureOut">
               <a:rPr lang="ru-RU" smtClean="0"/>
-              <a:t>12.03.2026</a:t>
+              <a:t>13.03.2026</a:t>
             </a:fld>
             <a:endParaRPr lang="ru-RU"/>
           </a:p>
@@ -605,7 +607,7 @@
           <a:p>
             <a:fld id="{32A15000-9175-4FB8-9666-11C5E7BD8C8A}" type="datetimeFigureOut">
               <a:rPr lang="ru-RU" smtClean="0"/>
-              <a:t>12.03.2026</a:t>
+              <a:t>13.03.2026</a:t>
             </a:fld>
             <a:endParaRPr lang="ru-RU"/>
           </a:p>
@@ -775,7 +777,7 @@
           <a:p>
             <a:fld id="{32A15000-9175-4FB8-9666-11C5E7BD8C8A}" type="datetimeFigureOut">
               <a:rPr lang="ru-RU" smtClean="0"/>
-              <a:t>12.03.2026</a:t>
+              <a:t>13.03.2026</a:t>
             </a:fld>
             <a:endParaRPr lang="ru-RU"/>
           </a:p>
@@ -1021,7 +1023,7 @@
           <a:p>
             <a:fld id="{32A15000-9175-4FB8-9666-11C5E7BD8C8A}" type="datetimeFigureOut">
               <a:rPr lang="ru-RU" smtClean="0"/>
-              <a:t>12.03.2026</a:t>
+              <a:t>13.03.2026</a:t>
             </a:fld>
             <a:endParaRPr lang="ru-RU"/>
           </a:p>
@@ -1253,7 +1255,7 @@
           <a:p>
             <a:fld id="{32A15000-9175-4FB8-9666-11C5E7BD8C8A}" type="datetimeFigureOut">
               <a:rPr lang="ru-RU" smtClean="0"/>
-              <a:t>12.03.2026</a:t>
+              <a:t>13.03.2026</a:t>
             </a:fld>
             <a:endParaRPr lang="ru-RU"/>
           </a:p>
@@ -1620,7 +1622,7 @@
           <a:p>
             <a:fld id="{32A15000-9175-4FB8-9666-11C5E7BD8C8A}" type="datetimeFigureOut">
               <a:rPr lang="ru-RU" smtClean="0"/>
-              <a:t>12.03.2026</a:t>
+              <a:t>13.03.2026</a:t>
             </a:fld>
             <a:endParaRPr lang="ru-RU"/>
           </a:p>
@@ -1738,7 +1740,7 @@
           <a:p>
             <a:fld id="{32A15000-9175-4FB8-9666-11C5E7BD8C8A}" type="datetimeFigureOut">
               <a:rPr lang="ru-RU" smtClean="0"/>
-              <a:t>12.03.2026</a:t>
+              <a:t>13.03.2026</a:t>
             </a:fld>
             <a:endParaRPr lang="ru-RU"/>
           </a:p>
@@ -1833,7 +1835,7 @@
           <a:p>
             <a:fld id="{32A15000-9175-4FB8-9666-11C5E7BD8C8A}" type="datetimeFigureOut">
               <a:rPr lang="ru-RU" smtClean="0"/>
-              <a:t>12.03.2026</a:t>
+              <a:t>13.03.2026</a:t>
             </a:fld>
             <a:endParaRPr lang="ru-RU"/>
           </a:p>
@@ -2110,7 +2112,7 @@
           <a:p>
             <a:fld id="{32A15000-9175-4FB8-9666-11C5E7BD8C8A}" type="datetimeFigureOut">
               <a:rPr lang="ru-RU" smtClean="0"/>
-              <a:t>12.03.2026</a:t>
+              <a:t>13.03.2026</a:t>
             </a:fld>
             <a:endParaRPr lang="ru-RU"/>
           </a:p>
@@ -2363,7 +2365,7 @@
           <a:p>
             <a:fld id="{32A15000-9175-4FB8-9666-11C5E7BD8C8A}" type="datetimeFigureOut">
               <a:rPr lang="ru-RU" smtClean="0"/>
-              <a:t>12.03.2026</a:t>
+              <a:t>13.03.2026</a:t>
             </a:fld>
             <a:endParaRPr lang="ru-RU"/>
           </a:p>
@@ -2576,7 +2578,7 @@
           <a:p>
             <a:fld id="{32A15000-9175-4FB8-9666-11C5E7BD8C8A}" type="datetimeFigureOut">
               <a:rPr lang="ru-RU" smtClean="0"/>
-              <a:t>12.03.2026</a:t>
+              <a:t>13.03.2026</a:t>
             </a:fld>
             <a:endParaRPr lang="ru-RU"/>
           </a:p>
@@ -3079,8 +3081,8 @@
         </p:nvSpPr>
         <p:spPr>
           <a:xfrm>
-            <a:off x="225308" y="4307728"/>
-            <a:ext cx="5177965" cy="2026570"/>
+            <a:off x="225308" y="3704897"/>
+            <a:ext cx="5177965" cy="2953599"/>
           </a:xfrm>
           <a:noFill/>
           <a:ln w="9525" cap="flat" cmpd="sng" algn="ctr">
@@ -3137,6 +3139,33 @@
               </a:rPr>
               <a:t>Участники: </a:t>
             </a:r>
+            <a:r>
+              <a:rPr lang="ru-RU" sz="2800" dirty="0" smtClean="0">
+                <a:solidFill>
+                  <a:schemeClr val="bg1"/>
+                </a:solidFill>
+                <a:latin typeface="Times New Roman" panose="02020603050405020304" pitchFamily="18" charset="0"/>
+                <a:cs typeface="Times New Roman" panose="02020603050405020304" pitchFamily="18" charset="0"/>
+              </a:rPr>
+              <a:t>Кириченко И.А. </a:t>
+            </a:r>
+            <a:r>
+              <a:rPr lang="ru-RU" sz="2800" dirty="0" smtClean="0">
+                <a:solidFill>
+                  <a:srgbClr val="FF0000"/>
+                </a:solidFill>
+                <a:latin typeface="Times New Roman" panose="02020603050405020304" pitchFamily="18" charset="0"/>
+                <a:cs typeface="Times New Roman" panose="02020603050405020304" pitchFamily="18" charset="0"/>
+              </a:rPr>
+              <a:t>(сюда впишите себя)</a:t>
+            </a:r>
+            <a:endParaRPr lang="ru-RU" sz="2800" dirty="0" smtClean="0">
+              <a:solidFill>
+                <a:srgbClr val="FF0000"/>
+              </a:solidFill>
+              <a:latin typeface="Times New Roman" panose="02020603050405020304" pitchFamily="18" charset="0"/>
+              <a:cs typeface="Times New Roman" panose="02020603050405020304" pitchFamily="18" charset="0"/>
+            </a:endParaRPr>
           </a:p>
           <a:p>
             <a:pPr algn="l"/>
@@ -3258,13 +3287,556 @@
             <p:ph type="title"/>
           </p:nvPr>
         </p:nvSpPr>
-        <p:spPr/>
-        <p:txBody>
-          <a:bodyPr/>
-          <a:lstStyle/>
-          <a:p>
-            <a:r>
-              <a:rPr lang="ru-RU" dirty="0" smtClean="0">
+        <p:spPr>
+          <a:xfrm>
+            <a:off x="839788" y="365125"/>
+            <a:ext cx="10515600" cy="1325563"/>
+          </a:xfrm>
+          <a:solidFill>
+            <a:schemeClr val="accent6">
+              <a:alpha val="50000"/>
+            </a:schemeClr>
+          </a:solidFill>
+          <a:ln>
+            <a:noFill/>
+          </a:ln>
+        </p:spPr>
+        <p:style>
+          <a:lnRef idx="0">
+            <a:scrgbClr r="0" g="0" b="0"/>
+          </a:lnRef>
+          <a:fillRef idx="0">
+            <a:scrgbClr r="0" g="0" b="0"/>
+          </a:fillRef>
+          <a:effectRef idx="0">
+            <a:scrgbClr r="0" g="0" b="0"/>
+          </a:effectRef>
+          <a:fontRef idx="minor">
+            <a:schemeClr val="lt1"/>
+          </a:fontRef>
+        </p:style>
+        <p:txBody>
+          <a:bodyPr>
+            <a:normAutofit/>
+          </a:bodyPr>
+          <a:lstStyle/>
+          <a:p>
+            <a:r>
+              <a:rPr lang="ru-RU" sz="3600" dirty="0" smtClean="0">
+                <a:solidFill>
+                  <a:schemeClr val="bg1"/>
+                </a:solidFill>
+                <a:latin typeface="Times New Roman" panose="02020603050405020304" pitchFamily="18" charset="0"/>
+                <a:cs typeface="Times New Roman" panose="02020603050405020304" pitchFamily="18" charset="0"/>
+              </a:rPr>
+              <a:t>Распределение ролей</a:t>
+            </a:r>
+            <a:endParaRPr lang="ru-RU" sz="4800" dirty="0">
+              <a:solidFill>
+                <a:schemeClr val="bg1"/>
+              </a:solidFill>
+              <a:latin typeface="Times New Roman" panose="02020603050405020304" pitchFamily="18" charset="0"/>
+              <a:cs typeface="Times New Roman" panose="02020603050405020304" pitchFamily="18" charset="0"/>
+            </a:endParaRPr>
+          </a:p>
+        </p:txBody>
+      </p:sp>
+      <p:sp>
+        <p:nvSpPr>
+          <p:cNvPr id="3" name="Текст 2"/>
+          <p:cNvSpPr>
+            <a:spLocks noGrp="1"/>
+          </p:cNvSpPr>
+          <p:nvPr>
+            <p:ph type="body" idx="1"/>
+          </p:nvPr>
+        </p:nvSpPr>
+        <p:spPr>
+          <a:xfrm>
+            <a:off x="839788" y="1970689"/>
+            <a:ext cx="5157787" cy="534385"/>
+          </a:xfrm>
+          <a:noFill/>
+          <a:ln w="9525" cap="flat" cmpd="sng" algn="ctr">
+            <a:solidFill>
+              <a:schemeClr val="accent4"/>
+            </a:solidFill>
+            <a:prstDash val="solid"/>
+            <a:round/>
+            <a:headEnd type="none" w="med" len="med"/>
+            <a:tailEnd type="none" w="med" len="med"/>
+          </a:ln>
+        </p:spPr>
+        <p:style>
+          <a:lnRef idx="0">
+            <a:scrgbClr r="0" g="0" b="0"/>
+          </a:lnRef>
+          <a:fillRef idx="0">
+            <a:scrgbClr r="0" g="0" b="0"/>
+          </a:fillRef>
+          <a:effectRef idx="0">
+            <a:scrgbClr r="0" g="0" b="0"/>
+          </a:effectRef>
+          <a:fontRef idx="minor">
+            <a:schemeClr val="accent4"/>
+          </a:fontRef>
+        </p:style>
+        <p:txBody>
+          <a:bodyPr/>
+          <a:lstStyle/>
+          <a:p>
+            <a:pPr algn="ctr"/>
+            <a:r>
+              <a:rPr lang="ru-RU" sz="2800" b="0" dirty="0" smtClean="0">
+                <a:solidFill>
+                  <a:schemeClr val="bg1"/>
+                </a:solidFill>
+                <a:latin typeface="Times New Roman" panose="02020603050405020304" pitchFamily="18" charset="0"/>
+                <a:cs typeface="Times New Roman" panose="02020603050405020304" pitchFamily="18" charset="0"/>
+              </a:rPr>
+              <a:t>Требования</a:t>
+            </a:r>
+            <a:endParaRPr lang="ru-RU" b="0" dirty="0">
+              <a:solidFill>
+                <a:schemeClr val="bg1"/>
+              </a:solidFill>
+              <a:latin typeface="Times New Roman" panose="02020603050405020304" pitchFamily="18" charset="0"/>
+              <a:cs typeface="Times New Roman" panose="02020603050405020304" pitchFamily="18" charset="0"/>
+            </a:endParaRPr>
+          </a:p>
+        </p:txBody>
+      </p:sp>
+      <p:sp>
+        <p:nvSpPr>
+          <p:cNvPr id="5" name="Текст 4"/>
+          <p:cNvSpPr>
+            <a:spLocks noGrp="1"/>
+          </p:cNvSpPr>
+          <p:nvPr>
+            <p:ph type="body" sz="quarter" idx="3"/>
+          </p:nvPr>
+        </p:nvSpPr>
+        <p:spPr>
+          <a:xfrm>
+            <a:off x="6172200" y="1970689"/>
+            <a:ext cx="5183188" cy="534386"/>
+          </a:xfrm>
+          <a:noFill/>
+          <a:ln w="9525" cap="flat" cmpd="sng" algn="ctr">
+            <a:solidFill>
+              <a:schemeClr val="accent4"/>
+            </a:solidFill>
+            <a:prstDash val="solid"/>
+            <a:round/>
+            <a:headEnd type="none" w="med" len="med"/>
+            <a:tailEnd type="none" w="med" len="med"/>
+          </a:ln>
+        </p:spPr>
+        <p:style>
+          <a:lnRef idx="0">
+            <a:scrgbClr r="0" g="0" b="0"/>
+          </a:lnRef>
+          <a:fillRef idx="0">
+            <a:scrgbClr r="0" g="0" b="0"/>
+          </a:fillRef>
+          <a:effectRef idx="0">
+            <a:scrgbClr r="0" g="0" b="0"/>
+          </a:effectRef>
+          <a:fontRef idx="minor">
+            <a:schemeClr val="accent4"/>
+          </a:fontRef>
+        </p:style>
+        <p:txBody>
+          <a:bodyPr>
+            <a:normAutofit/>
+          </a:bodyPr>
+          <a:lstStyle/>
+          <a:p>
+            <a:pPr algn="ctr"/>
+            <a:r>
+              <a:rPr lang="ru-RU" sz="2800" b="0" dirty="0" smtClean="0">
+                <a:solidFill>
+                  <a:schemeClr val="bg1"/>
+                </a:solidFill>
+                <a:latin typeface="Times New Roman" panose="02020603050405020304" pitchFamily="18" charset="0"/>
+                <a:cs typeface="Times New Roman" panose="02020603050405020304" pitchFamily="18" charset="0"/>
+              </a:rPr>
+              <a:t>Кто</a:t>
+            </a:r>
+            <a:r>
+              <a:rPr lang="ru-RU" sz="2800" dirty="0" smtClean="0">
+                <a:solidFill>
+                  <a:schemeClr val="bg1"/>
+                </a:solidFill>
+                <a:latin typeface="Times New Roman" panose="02020603050405020304" pitchFamily="18" charset="0"/>
+                <a:cs typeface="Times New Roman" panose="02020603050405020304" pitchFamily="18" charset="0"/>
+              </a:rPr>
+              <a:t> </a:t>
+            </a:r>
+            <a:r>
+              <a:rPr lang="ru-RU" sz="2800" b="0" dirty="0" smtClean="0">
+                <a:solidFill>
+                  <a:schemeClr val="bg1"/>
+                </a:solidFill>
+                <a:latin typeface="Times New Roman" panose="02020603050405020304" pitchFamily="18" charset="0"/>
+                <a:cs typeface="Times New Roman" panose="02020603050405020304" pitchFamily="18" charset="0"/>
+              </a:rPr>
+              <a:t>реализовывал</a:t>
+            </a:r>
+            <a:endParaRPr lang="ru-RU" sz="2800" b="0" dirty="0">
+              <a:solidFill>
+                <a:schemeClr val="bg1"/>
+              </a:solidFill>
+              <a:latin typeface="Times New Roman" panose="02020603050405020304" pitchFamily="18" charset="0"/>
+              <a:cs typeface="Times New Roman" panose="02020603050405020304" pitchFamily="18" charset="0"/>
+            </a:endParaRPr>
+          </a:p>
+        </p:txBody>
+      </p:sp>
+      <p:graphicFrame>
+        <p:nvGraphicFramePr>
+          <p:cNvPr id="10" name="Таблица 9"/>
+          <p:cNvGraphicFramePr>
+            <a:graphicFrameLocks noGrp="1"/>
+          </p:cNvGraphicFramePr>
+          <p:nvPr>
+            <p:extLst>
+              <p:ext uri="{D42A27DB-BD31-4B8C-83A1-F6EECF244321}">
+                <p14:modId xmlns:p14="http://schemas.microsoft.com/office/powerpoint/2010/main" val="4095797706"/>
+              </p:ext>
+            </p:extLst>
+          </p:nvPr>
+        </p:nvGraphicFramePr>
+        <p:xfrm>
+          <a:off x="839788" y="2979682"/>
+          <a:ext cx="10515600" cy="3294993"/>
+        </p:xfrm>
+        <a:graphic>
+          <a:graphicData uri="http://schemas.openxmlformats.org/drawingml/2006/table">
+            <a:tbl>
+              <a:tblPr firstRow="1" bandRow="1">
+                <a:tableStyleId>{2D5ABB26-0587-4C30-8999-92F81FD0307C}</a:tableStyleId>
+              </a:tblPr>
+              <a:tblGrid>
+                <a:gridCol w="5257800">
+                  <a:extLst>
+                    <a:ext uri="{9D8B030D-6E8A-4147-A177-3AD203B41FA5}">
+                      <a16:colId xmlns:a16="http://schemas.microsoft.com/office/drawing/2014/main" val="2413474966"/>
+                    </a:ext>
+                  </a:extLst>
+                </a:gridCol>
+                <a:gridCol w="5257800">
+                  <a:extLst>
+                    <a:ext uri="{9D8B030D-6E8A-4147-A177-3AD203B41FA5}">
+                      <a16:colId xmlns:a16="http://schemas.microsoft.com/office/drawing/2014/main" val="2038718843"/>
+                    </a:ext>
+                  </a:extLst>
+                </a:gridCol>
+              </a:tblGrid>
+              <a:tr h="1192777">
+                <a:tc>
+                  <a:txBody>
+                    <a:bodyPr/>
+                    <a:lstStyle/>
+                    <a:p>
+                      <a:pPr algn="ctr"/>
+                      <a:r>
+                        <a:rPr lang="ru-RU" sz="2400" dirty="0" smtClean="0">
+                          <a:solidFill>
+                            <a:schemeClr val="bg1"/>
+                          </a:solidFill>
+                          <a:latin typeface="Times New Roman" panose="02020603050405020304" pitchFamily="18" charset="0"/>
+                          <a:cs typeface="Times New Roman" panose="02020603050405020304" pitchFamily="18" charset="0"/>
+                        </a:rPr>
+                        <a:t>Расстановка</a:t>
+                      </a:r>
+                      <a:r>
+                        <a:rPr lang="ru-RU" sz="2400" baseline="0" dirty="0" smtClean="0">
+                          <a:solidFill>
+                            <a:schemeClr val="bg1"/>
+                          </a:solidFill>
+                          <a:latin typeface="Times New Roman" panose="02020603050405020304" pitchFamily="18" charset="0"/>
+                          <a:cs typeface="Times New Roman" panose="02020603050405020304" pitchFamily="18" charset="0"/>
+                        </a:rPr>
+                        <a:t> кораблей с использованием указателей</a:t>
+                      </a:r>
+                      <a:endParaRPr lang="ru-RU" sz="2400" dirty="0">
+                        <a:solidFill>
+                          <a:schemeClr val="bg1"/>
+                        </a:solidFill>
+                        <a:latin typeface="Times New Roman" panose="02020603050405020304" pitchFamily="18" charset="0"/>
+                        <a:cs typeface="Times New Roman" panose="02020603050405020304" pitchFamily="18" charset="0"/>
+                      </a:endParaRPr>
+                    </a:p>
+                  </a:txBody>
+                  <a:tcPr/>
+                </a:tc>
+                <a:tc>
+                  <a:txBody>
+                    <a:bodyPr/>
+                    <a:lstStyle/>
+                    <a:p>
+                      <a:pPr algn="ctr"/>
+                      <a:r>
+                        <a:rPr lang="ru-RU" sz="2400" dirty="0" smtClean="0">
+                          <a:solidFill>
+                            <a:schemeClr val="bg1"/>
+                          </a:solidFill>
+                          <a:latin typeface="Times New Roman" panose="02020603050405020304" pitchFamily="18" charset="0"/>
+                          <a:cs typeface="Times New Roman" panose="02020603050405020304" pitchFamily="18" charset="0"/>
+                        </a:rPr>
+                        <a:t>Кириченко Илья</a:t>
+                      </a:r>
+                      <a:endParaRPr lang="ru-RU" sz="2400" dirty="0">
+                        <a:solidFill>
+                          <a:schemeClr val="bg1"/>
+                        </a:solidFill>
+                        <a:latin typeface="Times New Roman" panose="02020603050405020304" pitchFamily="18" charset="0"/>
+                        <a:cs typeface="Times New Roman" panose="02020603050405020304" pitchFamily="18" charset="0"/>
+                      </a:endParaRPr>
+                    </a:p>
+                  </a:txBody>
+                  <a:tcPr/>
+                </a:tc>
+                <a:extLst>
+                  <a:ext uri="{0D108BD9-81ED-4DB2-BD59-A6C34878D82A}">
+                    <a16:rowId xmlns:a16="http://schemas.microsoft.com/office/drawing/2014/main" val="2869612846"/>
+                  </a:ext>
+                </a:extLst>
+              </a:tr>
+              <a:tr h="1051108">
+                <a:tc>
+                  <a:txBody>
+                    <a:bodyPr/>
+                    <a:lstStyle/>
+                    <a:p>
+                      <a:pPr algn="ctr"/>
+                      <a:r>
+                        <a:rPr lang="ru-RU" sz="2400" dirty="0" smtClean="0">
+                          <a:solidFill>
+                            <a:schemeClr val="bg1"/>
+                          </a:solidFill>
+                          <a:latin typeface="Times New Roman" panose="02020603050405020304" pitchFamily="18" charset="0"/>
+                          <a:cs typeface="Times New Roman" panose="02020603050405020304" pitchFamily="18" charset="0"/>
+                        </a:rPr>
+                        <a:t>Реализация</a:t>
+                      </a:r>
+                      <a:r>
+                        <a:rPr lang="ru-RU" sz="2400" baseline="0" dirty="0" smtClean="0">
+                          <a:solidFill>
+                            <a:schemeClr val="bg1"/>
+                          </a:solidFill>
+                          <a:latin typeface="Times New Roman" panose="02020603050405020304" pitchFamily="18" charset="0"/>
+                          <a:cs typeface="Times New Roman" panose="02020603050405020304" pitchFamily="18" charset="0"/>
+                        </a:rPr>
+                        <a:t> боя с ботом</a:t>
+                      </a:r>
+                      <a:endParaRPr lang="ru-RU" sz="2400" dirty="0">
+                        <a:solidFill>
+                          <a:schemeClr val="bg1"/>
+                        </a:solidFill>
+                        <a:latin typeface="Times New Roman" panose="02020603050405020304" pitchFamily="18" charset="0"/>
+                        <a:cs typeface="Times New Roman" panose="02020603050405020304" pitchFamily="18" charset="0"/>
+                      </a:endParaRPr>
+                    </a:p>
+                  </a:txBody>
+                  <a:tcPr/>
+                </a:tc>
+                <a:tc>
+                  <a:txBody>
+                    <a:bodyPr/>
+                    <a:lstStyle/>
+                    <a:p>
+                      <a:pPr algn="ctr"/>
+                      <a:r>
+                        <a:rPr lang="ru-RU" sz="2400" dirty="0" smtClean="0">
+                          <a:solidFill>
+                            <a:schemeClr val="bg1"/>
+                          </a:solidFill>
+                          <a:latin typeface="Times New Roman" panose="02020603050405020304" pitchFamily="18" charset="0"/>
+                          <a:cs typeface="Times New Roman" panose="02020603050405020304" pitchFamily="18" charset="0"/>
+                        </a:rPr>
+                        <a:t>Ваньков Павел</a:t>
+                      </a:r>
+                      <a:endParaRPr lang="ru-RU" sz="2400" dirty="0">
+                        <a:solidFill>
+                          <a:schemeClr val="bg1"/>
+                        </a:solidFill>
+                        <a:latin typeface="Times New Roman" panose="02020603050405020304" pitchFamily="18" charset="0"/>
+                        <a:cs typeface="Times New Roman" panose="02020603050405020304" pitchFamily="18" charset="0"/>
+                      </a:endParaRPr>
+                    </a:p>
+                  </a:txBody>
+                  <a:tcPr/>
+                </a:tc>
+                <a:extLst>
+                  <a:ext uri="{0D108BD9-81ED-4DB2-BD59-A6C34878D82A}">
+                    <a16:rowId xmlns:a16="http://schemas.microsoft.com/office/drawing/2014/main" val="2953311867"/>
+                  </a:ext>
+                </a:extLst>
+              </a:tr>
+              <a:tr h="1051108">
+                <a:tc>
+                  <a:txBody>
+                    <a:bodyPr/>
+                    <a:lstStyle/>
+                    <a:p>
+                      <a:pPr algn="ctr"/>
+                      <a:r>
+                        <a:rPr lang="ru-RU" sz="2400" dirty="0" smtClean="0">
+                          <a:solidFill>
+                            <a:schemeClr val="bg1"/>
+                          </a:solidFill>
+                          <a:latin typeface="Times New Roman" panose="02020603050405020304" pitchFamily="18" charset="0"/>
+                          <a:cs typeface="Times New Roman" panose="02020603050405020304" pitchFamily="18" charset="0"/>
+                        </a:rPr>
+                        <a:t>Внедрение потоков синхронизации</a:t>
+                      </a:r>
+                      <a:endParaRPr lang="ru-RU" sz="2400" dirty="0">
+                        <a:solidFill>
+                          <a:schemeClr val="bg1"/>
+                        </a:solidFill>
+                        <a:latin typeface="Times New Roman" panose="02020603050405020304" pitchFamily="18" charset="0"/>
+                        <a:cs typeface="Times New Roman" panose="02020603050405020304" pitchFamily="18" charset="0"/>
+                      </a:endParaRPr>
+                    </a:p>
+                  </a:txBody>
+                  <a:tcPr/>
+                </a:tc>
+                <a:tc>
+                  <a:txBody>
+                    <a:bodyPr/>
+                    <a:lstStyle/>
+                    <a:p>
+                      <a:pPr algn="ctr"/>
+                      <a:r>
+                        <a:rPr lang="ru-RU" sz="2400" dirty="0" smtClean="0">
+                          <a:solidFill>
+                            <a:schemeClr val="bg1"/>
+                          </a:solidFill>
+                          <a:latin typeface="Times New Roman" panose="02020603050405020304" pitchFamily="18" charset="0"/>
+                          <a:cs typeface="Times New Roman" panose="02020603050405020304" pitchFamily="18" charset="0"/>
+                        </a:rPr>
+                        <a:t>Ситков Даниил</a:t>
+                      </a:r>
+                      <a:endParaRPr lang="ru-RU" sz="2400" dirty="0">
+                        <a:solidFill>
+                          <a:schemeClr val="bg1"/>
+                        </a:solidFill>
+                        <a:latin typeface="Times New Roman" panose="02020603050405020304" pitchFamily="18" charset="0"/>
+                        <a:cs typeface="Times New Roman" panose="02020603050405020304" pitchFamily="18" charset="0"/>
+                      </a:endParaRPr>
+                    </a:p>
+                  </a:txBody>
+                  <a:tcPr/>
+                </a:tc>
+                <a:extLst>
+                  <a:ext uri="{0D108BD9-81ED-4DB2-BD59-A6C34878D82A}">
+                    <a16:rowId xmlns:a16="http://schemas.microsoft.com/office/drawing/2014/main" val="1589135334"/>
+                  </a:ext>
+                </a:extLst>
+              </a:tr>
+            </a:tbl>
+          </a:graphicData>
+        </a:graphic>
+      </p:graphicFrame>
+    </p:spTree>
+    <p:extLst>
+      <p:ext uri="{BB962C8B-B14F-4D97-AF65-F5344CB8AC3E}">
+        <p14:creationId xmlns:p14="http://schemas.microsoft.com/office/powerpoint/2010/main" val="3511840511"/>
+      </p:ext>
+    </p:extLst>
+  </p:cSld>
+  <p:clrMapOvr>
+    <a:masterClrMapping/>
+  </p:clrMapOvr>
+  <p:timing>
+    <p:tnLst>
+      <p:par>
+        <p:cTn id="1" dur="indefinite" restart="never" nodeType="tmRoot"/>
+      </p:par>
+    </p:tnLst>
+  </p:timing>
+</p:sld>
+</file>
+
+<file path=ppt/slides/slide3.xml><?xml version="1.0" encoding="utf-8"?>
+<p:sld xmlns:a="http://schemas.openxmlformats.org/drawingml/2006/main" xmlns:r="http://schemas.openxmlformats.org/officeDocument/2006/relationships" xmlns:p="http://schemas.openxmlformats.org/presentationml/2006/main">
+  <p:cSld>
+    <p:bg>
+      <p:bgPr>
+        <a:blipFill dpi="0" rotWithShape="1">
+          <a:blip r:embed="rId2">
+            <a:lum/>
+          </a:blip>
+          <a:srcRect/>
+          <a:stretch>
+            <a:fillRect t="-1000" b="-1000"/>
+          </a:stretch>
+        </a:blipFill>
+        <a:effectLst/>
+      </p:bgPr>
+    </p:bg>
+    <p:spTree>
+      <p:nvGrpSpPr>
+        <p:cNvPr id="1" name=""/>
+        <p:cNvGrpSpPr/>
+        <p:nvPr/>
+      </p:nvGrpSpPr>
+      <p:grpSpPr>
+        <a:xfrm>
+          <a:off x="0" y="0"/>
+          <a:ext cx="0" cy="0"/>
+          <a:chOff x="0" y="0"/>
+          <a:chExt cx="0" cy="0"/>
+        </a:xfrm>
+      </p:grpSpPr>
+      <p:sp>
+        <p:nvSpPr>
+          <p:cNvPr id="2" name="Заголовок 1"/>
+          <p:cNvSpPr>
+            <a:spLocks noGrp="1"/>
+          </p:cNvSpPr>
+          <p:nvPr>
+            <p:ph type="title"/>
+          </p:nvPr>
+        </p:nvSpPr>
+        <p:spPr>
+          <a:xfrm>
+            <a:off x="488731" y="945931"/>
+            <a:ext cx="10279117" cy="638502"/>
+          </a:xfrm>
+          <a:solidFill>
+            <a:schemeClr val="accent6">
+              <a:alpha val="50000"/>
+            </a:schemeClr>
+          </a:solidFill>
+          <a:ln>
+            <a:noFill/>
+          </a:ln>
+        </p:spPr>
+        <p:style>
+          <a:lnRef idx="0">
+            <a:scrgbClr r="0" g="0" b="0"/>
+          </a:lnRef>
+          <a:fillRef idx="0">
+            <a:scrgbClr r="0" g="0" b="0"/>
+          </a:fillRef>
+          <a:effectRef idx="0">
+            <a:scrgbClr r="0" g="0" b="0"/>
+          </a:effectRef>
+          <a:fontRef idx="minor">
+            <a:schemeClr val="lt1"/>
+          </a:fontRef>
+        </p:style>
+        <p:txBody>
+          <a:bodyPr>
+            <a:noAutofit/>
+          </a:bodyPr>
+          <a:lstStyle/>
+          <a:p>
+            <a:r>
+              <a:rPr lang="ru-RU" sz="3600" dirty="0" smtClean="0">
                 <a:solidFill>
                   <a:schemeClr val="bg1"/>
                 </a:solidFill>
@@ -3273,7 +3845,7 @@
               </a:rPr>
               <a:t>Постановка задачи и требования</a:t>
             </a:r>
-            <a:endParaRPr lang="ru-RU" dirty="0">
+            <a:endParaRPr lang="ru-RU" sz="3600" dirty="0">
               <a:solidFill>
                 <a:schemeClr val="bg1"/>
               </a:solidFill>
@@ -3283,15 +3855,257 @@
           </a:p>
         </p:txBody>
       </p:sp>
+      <p:sp>
+        <p:nvSpPr>
+          <p:cNvPr id="3" name="TextBox 2"/>
+          <p:cNvSpPr txBox="1"/>
+          <p:nvPr/>
+        </p:nvSpPr>
+        <p:spPr>
+          <a:xfrm>
+            <a:off x="7047951" y="3740502"/>
+            <a:ext cx="3719897" cy="2308324"/>
+          </a:xfrm>
+          <a:prstGeom prst="rect">
+            <a:avLst/>
+          </a:prstGeom>
+          <a:noFill/>
+        </p:spPr>
+        <p:txBody>
+          <a:bodyPr wrap="square" rtlCol="0">
+            <a:spAutoFit/>
+          </a:bodyPr>
+          <a:lstStyle/>
+          <a:p>
+            <a:r>
+              <a:rPr lang="ru-RU" sz="3600" dirty="0" smtClean="0">
+                <a:solidFill>
+                  <a:srgbClr val="FF0000"/>
+                </a:solidFill>
+              </a:rPr>
+              <a:t>Добавьте скрины примеров  используемого кода</a:t>
+            </a:r>
+            <a:endParaRPr lang="ru-RU" sz="3600" dirty="0">
+              <a:solidFill>
+                <a:srgbClr val="FF0000"/>
+              </a:solidFill>
+            </a:endParaRPr>
+          </a:p>
+        </p:txBody>
+      </p:sp>
+      <p:graphicFrame>
+        <p:nvGraphicFramePr>
+          <p:cNvPr id="6" name="Таблица 5"/>
+          <p:cNvGraphicFramePr>
+            <a:graphicFrameLocks noGrp="1"/>
+          </p:cNvGraphicFramePr>
+          <p:nvPr>
+            <p:extLst>
+              <p:ext uri="{D42A27DB-BD31-4B8C-83A1-F6EECF244321}">
+                <p14:modId xmlns:p14="http://schemas.microsoft.com/office/powerpoint/2010/main" val="1027386015"/>
+              </p:ext>
+            </p:extLst>
+          </p:nvPr>
+        </p:nvGraphicFramePr>
+        <p:xfrm>
+          <a:off x="838200" y="2506716"/>
+          <a:ext cx="10515600" cy="3652929"/>
+        </p:xfrm>
+        <a:graphic>
+          <a:graphicData uri="http://schemas.openxmlformats.org/drawingml/2006/table">
+            <a:tbl>
+              <a:tblPr firstRow="1" bandRow="1">
+                <a:tableStyleId>{2D5ABB26-0587-4C30-8999-92F81FD0307C}</a:tableStyleId>
+              </a:tblPr>
+              <a:tblGrid>
+                <a:gridCol w="5257800">
+                  <a:extLst>
+                    <a:ext uri="{9D8B030D-6E8A-4147-A177-3AD203B41FA5}">
+                      <a16:colId xmlns:a16="http://schemas.microsoft.com/office/drawing/2014/main" val="2413474966"/>
+                    </a:ext>
+                  </a:extLst>
+                </a:gridCol>
+                <a:gridCol w="5257800">
+                  <a:extLst>
+                    <a:ext uri="{9D8B030D-6E8A-4147-A177-3AD203B41FA5}">
+                      <a16:colId xmlns:a16="http://schemas.microsoft.com/office/drawing/2014/main" val="2038718843"/>
+                    </a:ext>
+                  </a:extLst>
+                </a:gridCol>
+              </a:tblGrid>
+              <a:tr h="1217643">
+                <a:tc>
+                  <a:txBody>
+                    <a:bodyPr/>
+                    <a:lstStyle/>
+                    <a:p>
+                      <a:pPr marL="285750" indent="-285750">
+                        <a:buFont typeface="Arial" panose="020B0604020202020204" pitchFamily="34" charset="0"/>
+                        <a:buChar char="•"/>
+                      </a:pPr>
+                      <a:r>
+                        <a:rPr lang="ru-RU" sz="2400" dirty="0" smtClean="0">
+                          <a:solidFill>
+                            <a:schemeClr val="bg1"/>
+                          </a:solidFill>
+                          <a:latin typeface="Times New Roman" panose="02020603050405020304" pitchFamily="18" charset="0"/>
+                          <a:cs typeface="Times New Roman" panose="02020603050405020304" pitchFamily="18" charset="0"/>
+                        </a:rPr>
+                        <a:t>Работа с динамической памятью (указатели)</a:t>
+                      </a:r>
+                      <a:endParaRPr lang="ru-RU" sz="2400" dirty="0" smtClean="0">
+                        <a:solidFill>
+                          <a:schemeClr val="bg1"/>
+                        </a:solidFill>
+                        <a:latin typeface="Times New Roman" panose="02020603050405020304" pitchFamily="18" charset="0"/>
+                        <a:cs typeface="Times New Roman" panose="02020603050405020304" pitchFamily="18" charset="0"/>
+                      </a:endParaRPr>
+                    </a:p>
+                  </a:txBody>
+                  <a:tcPr/>
+                </a:tc>
+                <a:tc>
+                  <a:txBody>
+                    <a:bodyPr/>
+                    <a:lstStyle/>
+                    <a:p>
+                      <a:pPr algn="ctr"/>
+                      <a:endParaRPr lang="ru-RU" sz="2400" dirty="0">
+                        <a:solidFill>
+                          <a:schemeClr val="bg1"/>
+                        </a:solidFill>
+                        <a:latin typeface="Times New Roman" panose="02020603050405020304" pitchFamily="18" charset="0"/>
+                        <a:cs typeface="Times New Roman" panose="02020603050405020304" pitchFamily="18" charset="0"/>
+                      </a:endParaRPr>
+                    </a:p>
+                  </a:txBody>
+                  <a:tcPr/>
+                </a:tc>
+                <a:extLst>
+                  <a:ext uri="{0D108BD9-81ED-4DB2-BD59-A6C34878D82A}">
+                    <a16:rowId xmlns:a16="http://schemas.microsoft.com/office/drawing/2014/main" val="2869612846"/>
+                  </a:ext>
+                </a:extLst>
+              </a:tr>
+              <a:tr h="1217643">
+                <a:tc>
+                  <a:txBody>
+                    <a:bodyPr/>
+                    <a:lstStyle/>
+                    <a:p>
+                      <a:pPr marL="285750" indent="-285750">
+                        <a:buFont typeface="Arial" panose="020B0604020202020204" pitchFamily="34" charset="0"/>
+                        <a:buChar char="•"/>
+                      </a:pPr>
+                      <a:r>
+                        <a:rPr lang="ru-RU" sz="2400" dirty="0" smtClean="0">
+                          <a:solidFill>
+                            <a:schemeClr val="bg1"/>
+                          </a:solidFill>
+                          <a:latin typeface="Times New Roman" panose="02020603050405020304" pitchFamily="18" charset="0"/>
+                          <a:cs typeface="Times New Roman" panose="02020603050405020304" pitchFamily="18" charset="0"/>
+                        </a:rPr>
+                        <a:t>Многопоточность (потоки)</a:t>
+                      </a:r>
+                      <a:endParaRPr lang="ru-RU" sz="2400" dirty="0" smtClean="0">
+                        <a:solidFill>
+                          <a:schemeClr val="bg1"/>
+                        </a:solidFill>
+                        <a:latin typeface="Times New Roman" panose="02020603050405020304" pitchFamily="18" charset="0"/>
+                        <a:cs typeface="Times New Roman" panose="02020603050405020304" pitchFamily="18" charset="0"/>
+                      </a:endParaRPr>
+                    </a:p>
+                  </a:txBody>
+                  <a:tcPr/>
+                </a:tc>
+                <a:tc>
+                  <a:txBody>
+                    <a:bodyPr/>
+                    <a:lstStyle/>
+                    <a:p>
+                      <a:pPr algn="ctr"/>
+                      <a:endParaRPr lang="ru-RU" sz="2400" dirty="0">
+                        <a:solidFill>
+                          <a:schemeClr val="bg1"/>
+                        </a:solidFill>
+                        <a:latin typeface="Times New Roman" panose="02020603050405020304" pitchFamily="18" charset="0"/>
+                        <a:cs typeface="Times New Roman" panose="02020603050405020304" pitchFamily="18" charset="0"/>
+                      </a:endParaRPr>
+                    </a:p>
+                  </a:txBody>
+                  <a:tcPr/>
+                </a:tc>
+                <a:extLst>
+                  <a:ext uri="{0D108BD9-81ED-4DB2-BD59-A6C34878D82A}">
+                    <a16:rowId xmlns:a16="http://schemas.microsoft.com/office/drawing/2014/main" val="2953311867"/>
+                  </a:ext>
+                </a:extLst>
+              </a:tr>
+              <a:tr h="1217643">
+                <a:tc>
+                  <a:txBody>
+                    <a:bodyPr/>
+                    <a:lstStyle/>
+                    <a:p>
+                      <a:pPr marL="285750" indent="-285750">
+                        <a:buFont typeface="Arial" panose="020B0604020202020204" pitchFamily="34" charset="0"/>
+                        <a:buChar char="•"/>
+                      </a:pPr>
+                      <a:r>
+                        <a:rPr lang="ru-RU" sz="2400" dirty="0" smtClean="0">
+                          <a:solidFill>
+                            <a:schemeClr val="bg1"/>
+                          </a:solidFill>
+                          <a:latin typeface="Times New Roman" panose="02020603050405020304" pitchFamily="18" charset="0"/>
+                          <a:cs typeface="Times New Roman" panose="02020603050405020304" pitchFamily="18" charset="0"/>
+                        </a:rPr>
+                        <a:t>Синхронизация (мьютексы, ивенты)</a:t>
+                      </a:r>
+                      <a:endParaRPr lang="ru-RU" sz="2400" dirty="0" smtClean="0">
+                        <a:solidFill>
+                          <a:schemeClr val="bg1"/>
+                        </a:solidFill>
+                        <a:latin typeface="Times New Roman" panose="02020603050405020304" pitchFamily="18" charset="0"/>
+                        <a:cs typeface="Times New Roman" panose="02020603050405020304" pitchFamily="18" charset="0"/>
+                      </a:endParaRPr>
+                    </a:p>
+                  </a:txBody>
+                  <a:tcPr/>
+                </a:tc>
+                <a:tc>
+                  <a:txBody>
+                    <a:bodyPr/>
+                    <a:lstStyle/>
+                    <a:p>
+                      <a:pPr algn="ctr"/>
+                      <a:endParaRPr lang="ru-RU" sz="2400" dirty="0">
+                        <a:solidFill>
+                          <a:schemeClr val="bg1"/>
+                        </a:solidFill>
+                        <a:latin typeface="Times New Roman" panose="02020603050405020304" pitchFamily="18" charset="0"/>
+                        <a:cs typeface="Times New Roman" panose="02020603050405020304" pitchFamily="18" charset="0"/>
+                      </a:endParaRPr>
+                    </a:p>
+                  </a:txBody>
+                  <a:tcPr/>
+                </a:tc>
+                <a:extLst>
+                  <a:ext uri="{0D108BD9-81ED-4DB2-BD59-A6C34878D82A}">
+                    <a16:rowId xmlns:a16="http://schemas.microsoft.com/office/drawing/2014/main" val="1589135334"/>
+                  </a:ext>
+                </a:extLst>
+              </a:tr>
+            </a:tbl>
+          </a:graphicData>
+        </a:graphic>
+      </p:graphicFrame>
       <p:pic>
         <p:nvPicPr>
-          <p:cNvPr id="5" name="Объект 4"/>
+          <p:cNvPr id="7" name="Объект 4"/>
           <p:cNvPicPr>
-            <a:picLocks noGrp="1" noChangeAspect="1"/>
+            <a:picLocks noChangeAspect="1"/>
           </p:cNvPicPr>
-          <p:nvPr>
-            <p:ph idx="1"/>
-          </p:nvPr>
+          <p:nvPr/>
         </p:nvPicPr>
         <p:blipFill>
           <a:blip r:embed="rId3"/>
@@ -3301,53 +4115,130 @@
         </p:blipFill>
         <p:spPr>
           <a:xfrm>
-            <a:off x="7293032" y="2460566"/>
-            <a:ext cx="2819832" cy="598731"/>
+            <a:off x="7115504" y="2617077"/>
+            <a:ext cx="3042746" cy="677916"/>
           </a:xfrm>
           <a:prstGeom prst="rect">
             <a:avLst/>
           </a:prstGeom>
         </p:spPr>
       </p:pic>
-      <p:sp>
-        <p:nvSpPr>
-          <p:cNvPr id="4" name="Текст 3"/>
-          <p:cNvSpPr>
-            <a:spLocks noGrp="1"/>
-          </p:cNvSpPr>
-          <p:nvPr>
-            <p:ph type="body" sz="half" idx="2"/>
+    </p:spTree>
+    <p:extLst>
+      <p:ext uri="{BB962C8B-B14F-4D97-AF65-F5344CB8AC3E}">
+        <p14:creationId xmlns:p14="http://schemas.microsoft.com/office/powerpoint/2010/main" val="484110935"/>
+      </p:ext>
+    </p:extLst>
+  </p:cSld>
+  <p:clrMapOvr>
+    <a:masterClrMapping/>
+  </p:clrMapOvr>
+  <p:timing>
+    <p:tnLst>
+      <p:par>
+        <p:cTn id="1" dur="indefinite" restart="never" nodeType="tmRoot"/>
+      </p:par>
+    </p:tnLst>
+  </p:timing>
+</p:sld>
+</file>
+
+<file path=ppt/slides/slide4.xml><?xml version="1.0" encoding="utf-8"?>
+<p:sld xmlns:a="http://schemas.openxmlformats.org/drawingml/2006/main" xmlns:r="http://schemas.openxmlformats.org/officeDocument/2006/relationships" xmlns:p="http://schemas.openxmlformats.org/presentationml/2006/main">
+  <p:cSld>
+    <p:bg>
+      <p:bgPr>
+        <a:blipFill dpi="0" rotWithShape="1">
+          <a:blip r:embed="rId2">
+            <a:lum/>
+          </a:blip>
+          <a:srcRect/>
+          <a:stretch>
+            <a:fillRect t="-1000" b="-1000"/>
+          </a:stretch>
+        </a:blipFill>
+        <a:effectLst/>
+      </p:bgPr>
+    </p:bg>
+    <p:spTree>
+      <p:nvGrpSpPr>
+        <p:cNvPr id="1" name=""/>
+        <p:cNvGrpSpPr/>
+        <p:nvPr/>
+      </p:nvGrpSpPr>
+      <p:grpSpPr>
+        <a:xfrm>
+          <a:off x="0" y="0"/>
+          <a:ext cx="0" cy="0"/>
+          <a:chOff x="0" y="0"/>
+          <a:chExt cx="0" cy="0"/>
+        </a:xfrm>
+      </p:grpSpPr>
+      <p:sp>
+        <p:nvSpPr>
+          <p:cNvPr id="2" name="Заголовок 1"/>
+          <p:cNvSpPr>
+            <a:spLocks noGrp="1"/>
+          </p:cNvSpPr>
+          <p:nvPr>
+            <p:ph type="title"/>
           </p:nvPr>
         </p:nvSpPr>
         <p:spPr>
           <a:xfrm>
-            <a:off x="839787" y="2460566"/>
-            <a:ext cx="4530235" cy="3823856"/>
+            <a:off x="662152" y="220718"/>
+            <a:ext cx="4852112" cy="1206827"/>
           </a:xfrm>
+          <a:solidFill>
+            <a:schemeClr val="accent6">
+              <a:alpha val="50000"/>
+            </a:schemeClr>
+          </a:solidFill>
+          <a:ln>
+            <a:noFill/>
+          </a:ln>
         </p:spPr>
+        <p:style>
+          <a:lnRef idx="0">
+            <a:scrgbClr r="0" g="0" b="0"/>
+          </a:lnRef>
+          <a:fillRef idx="0">
+            <a:scrgbClr r="0" g="0" b="0"/>
+          </a:fillRef>
+          <a:effectRef idx="0">
+            <a:scrgbClr r="0" g="0" b="0"/>
+          </a:effectRef>
+          <a:fontRef idx="minor">
+            <a:schemeClr val="lt1"/>
+          </a:fontRef>
+        </p:style>
         <p:txBody>
           <a:bodyPr>
-            <a:normAutofit/>
+            <a:noAutofit/>
           </a:bodyPr>
           <a:lstStyle/>
           <a:p>
-            <a:pPr marL="285750" indent="-285750">
-              <a:buFont typeface="Arial" panose="020B0604020202020204" pitchFamily="34" charset="0"/>
-              <a:buChar char="•"/>
-            </a:pPr>
-            <a:r>
-              <a:rPr lang="ru-RU" sz="2000" dirty="0" smtClean="0">
+            <a:r>
+              <a:rPr lang="ru-RU" sz="3600" dirty="0">
                 <a:solidFill>
                   <a:schemeClr val="bg1"/>
                 </a:solidFill>
                 <a:latin typeface="Times New Roman" panose="02020603050405020304" pitchFamily="18" charset="0"/>
                 <a:cs typeface="Times New Roman" panose="02020603050405020304" pitchFamily="18" charset="0"/>
               </a:rPr>
-              <a:t>Работа с динамической памятью (указатели)</a:t>
-            </a:r>
-          </a:p>
-          <a:p>
-            <a:endParaRPr lang="ru-RU" sz="2000" dirty="0" smtClean="0">
+              <a:t>Расстановка кораблей и работа с </a:t>
+            </a:r>
+            <a:r>
+              <a:rPr lang="ru-RU" sz="3600" dirty="0" smtClean="0">
+                <a:solidFill>
+                  <a:schemeClr val="bg1"/>
+                </a:solidFill>
+                <a:latin typeface="Times New Roman" panose="02020603050405020304" pitchFamily="18" charset="0"/>
+                <a:cs typeface="Times New Roman" panose="02020603050405020304" pitchFamily="18" charset="0"/>
+              </a:rPr>
+              <a:t>памятью</a:t>
+            </a:r>
+            <a:endParaRPr lang="ru-RU" sz="3600" dirty="0">
               <a:solidFill>
                 <a:schemeClr val="bg1"/>
               </a:solidFill>
@@ -3355,24 +4246,71 @@
               <a:cs typeface="Times New Roman" panose="02020603050405020304" pitchFamily="18" charset="0"/>
             </a:endParaRPr>
           </a:p>
-          <a:p>
-            <a:pPr marL="285750" indent="-285750">
+        </p:txBody>
+      </p:sp>
+      <p:sp>
+        <p:nvSpPr>
+          <p:cNvPr id="4" name="Текст 3"/>
+          <p:cNvSpPr>
+            <a:spLocks noGrp="1"/>
+          </p:cNvSpPr>
+          <p:nvPr>
+            <p:ph type="body" sz="half" idx="2"/>
+          </p:nvPr>
+        </p:nvSpPr>
+        <p:spPr>
+          <a:xfrm>
+            <a:off x="0" y="7064485"/>
+            <a:ext cx="5297214" cy="3403819"/>
+          </a:xfrm>
+          <a:noFill/>
+          <a:ln w="9525" cap="flat" cmpd="sng" algn="ctr">
+            <a:solidFill>
+              <a:schemeClr val="accent4"/>
+            </a:solidFill>
+            <a:prstDash val="solid"/>
+            <a:round/>
+            <a:headEnd type="none" w="med" len="med"/>
+            <a:tailEnd type="none" w="med" len="med"/>
+          </a:ln>
+        </p:spPr>
+        <p:style>
+          <a:lnRef idx="0">
+            <a:scrgbClr r="0" g="0" b="0"/>
+          </a:lnRef>
+          <a:fillRef idx="0">
+            <a:scrgbClr r="0" g="0" b="0"/>
+          </a:fillRef>
+          <a:effectRef idx="0">
+            <a:scrgbClr r="0" g="0" b="0"/>
+          </a:effectRef>
+          <a:fontRef idx="minor">
+            <a:schemeClr val="accent4"/>
+          </a:fontRef>
+        </p:style>
+        <p:txBody>
+          <a:bodyPr>
+            <a:normAutofit/>
+          </a:bodyPr>
+          <a:lstStyle/>
+          <a:p>
+            <a:pPr marL="342900" indent="-342900">
               <a:buFont typeface="Arial" panose="020B0604020202020204" pitchFamily="34" charset="0"/>
               <a:buChar char="•"/>
             </a:pPr>
             <a:r>
-              <a:rPr lang="ru-RU" sz="2000" dirty="0" smtClean="0">
+              <a:rPr lang="ru-RU" sz="2400" dirty="0" smtClean="0">
                 <a:solidFill>
                   <a:schemeClr val="bg1"/>
                 </a:solidFill>
                 <a:latin typeface="Times New Roman" panose="02020603050405020304" pitchFamily="18" charset="0"/>
                 <a:cs typeface="Times New Roman" panose="02020603050405020304" pitchFamily="18" charset="0"/>
               </a:rPr>
-              <a:t>Многопоточность (потоки)</a:t>
-            </a:r>
-          </a:p>
-          <a:p>
-            <a:endParaRPr lang="ru-RU" sz="2000" dirty="0" smtClean="0">
+              <a:t>Реализовал хранение поле через массив указателей</a:t>
+            </a:r>
+          </a:p>
+          <a:p>
+            <a:endParaRPr lang="ru-RU" sz="2400" dirty="0" smtClean="0">
               <a:solidFill>
                 <a:schemeClr val="bg1"/>
               </a:solidFill>
@@ -3381,43 +4319,46 @@
             </a:endParaRPr>
           </a:p>
           <a:p>
-            <a:pPr marL="285750" indent="-285750">
+            <a:pPr marL="342900" indent="-342900">
               <a:buFont typeface="Arial" panose="020B0604020202020204" pitchFamily="34" charset="0"/>
               <a:buChar char="•"/>
             </a:pPr>
             <a:r>
-              <a:rPr lang="ru-RU" sz="2000" dirty="0" smtClean="0">
+              <a:rPr lang="ru-RU" sz="2400" dirty="0" smtClean="0">
                 <a:solidFill>
                   <a:schemeClr val="bg1"/>
                 </a:solidFill>
                 <a:latin typeface="Times New Roman" panose="02020603050405020304" pitchFamily="18" charset="0"/>
                 <a:cs typeface="Times New Roman" panose="02020603050405020304" pitchFamily="18" charset="0"/>
               </a:rPr>
-              <a:t>Синхронизация (</a:t>
-            </a:r>
-            <a:r>
-              <a:rPr lang="ru-RU" sz="2000" dirty="0">
+              <a:t>Организовал динамическое создание кораблей</a:t>
+            </a:r>
+          </a:p>
+          <a:p>
+            <a:endParaRPr lang="ru-RU" sz="2400" dirty="0" smtClean="0">
+              <a:solidFill>
+                <a:schemeClr val="bg1"/>
+              </a:solidFill>
+              <a:latin typeface="Times New Roman" panose="02020603050405020304" pitchFamily="18" charset="0"/>
+              <a:cs typeface="Times New Roman" panose="02020603050405020304" pitchFamily="18" charset="0"/>
+            </a:endParaRPr>
+          </a:p>
+          <a:p>
+            <a:pPr marL="342900" indent="-342900">
+              <a:buFont typeface="Arial" panose="020B0604020202020204" pitchFamily="34" charset="0"/>
+              <a:buChar char="•"/>
+            </a:pPr>
+            <a:r>
+              <a:rPr lang="ru-RU" sz="2400" dirty="0" smtClean="0">
                 <a:solidFill>
                   <a:schemeClr val="bg1"/>
                 </a:solidFill>
                 <a:latin typeface="Times New Roman" panose="02020603050405020304" pitchFamily="18" charset="0"/>
                 <a:cs typeface="Times New Roman" panose="02020603050405020304" pitchFamily="18" charset="0"/>
               </a:rPr>
-              <a:t>м</a:t>
-            </a:r>
-            <a:r>
-              <a:rPr lang="ru-RU" sz="2000" dirty="0" smtClean="0">
-                <a:solidFill>
-                  <a:schemeClr val="bg1"/>
-                </a:solidFill>
-                <a:latin typeface="Times New Roman" panose="02020603050405020304" pitchFamily="18" charset="0"/>
-                <a:cs typeface="Times New Roman" panose="02020603050405020304" pitchFamily="18" charset="0"/>
-              </a:rPr>
-              <a:t>ьютексы, ивенты)</a:t>
-            </a:r>
-          </a:p>
-          <a:p>
-            <a:endParaRPr lang="ru-RU" sz="2000" dirty="0" smtClean="0">
+              <a:t>Реализовал деструктор для освобождения памяти</a:t>
+            </a:r>
+            <a:endParaRPr lang="ru-RU" sz="2400" dirty="0">
               <a:solidFill>
                 <a:schemeClr val="bg1"/>
               </a:solidFill>
@@ -3425,45 +4366,319 @@
               <a:cs typeface="Times New Roman" panose="02020603050405020304" pitchFamily="18" charset="0"/>
             </a:endParaRPr>
           </a:p>
-          <a:p>
-            <a:pPr marL="285750" indent="-285750">
-              <a:buFont typeface="Arial" panose="020B0604020202020204" pitchFamily="34" charset="0"/>
-              <a:buChar char="•"/>
-            </a:pPr>
-            <a:r>
-              <a:rPr lang="ru-RU" sz="2000" dirty="0" smtClean="0">
-                <a:solidFill>
-                  <a:schemeClr val="bg1"/>
-                </a:solidFill>
-                <a:latin typeface="Times New Roman" panose="02020603050405020304" pitchFamily="18" charset="0"/>
-                <a:cs typeface="Times New Roman" panose="02020603050405020304" pitchFamily="18" charset="0"/>
-              </a:rPr>
-              <a:t>Взаимодействие с ботом</a:t>
-            </a:r>
-            <a:r>
-              <a:rPr lang="ru-RU" sz="2000" dirty="0" smtClean="0">
-                <a:solidFill>
-                  <a:schemeClr val="bg1"/>
-                </a:solidFill>
-                <a:latin typeface="Times New Roman" panose="02020603050405020304" pitchFamily="18" charset="0"/>
-                <a:cs typeface="Times New Roman" panose="02020603050405020304" pitchFamily="18" charset="0"/>
-              </a:rPr>
-              <a:t> </a:t>
-            </a:r>
-          </a:p>
-          <a:p>
-            <a:pPr algn="just"/>
-            <a:endParaRPr lang="ru-RU" dirty="0">
-              <a:latin typeface="Times New Roman" panose="02020603050405020304" pitchFamily="18" charset="0"/>
-              <a:cs typeface="Times New Roman" panose="02020603050405020304" pitchFamily="18" charset="0"/>
-            </a:endParaRPr>
-          </a:p>
-        </p:txBody>
-      </p:sp>
+        </p:txBody>
+      </p:sp>
+      <p:graphicFrame>
+        <p:nvGraphicFramePr>
+          <p:cNvPr id="6" name="Таблица 5"/>
+          <p:cNvGraphicFramePr>
+            <a:graphicFrameLocks noGrp="1"/>
+          </p:cNvGraphicFramePr>
+          <p:nvPr>
+            <p:extLst>
+              <p:ext uri="{D42A27DB-BD31-4B8C-83A1-F6EECF244321}">
+                <p14:modId xmlns:p14="http://schemas.microsoft.com/office/powerpoint/2010/main" val="3998894801"/>
+              </p:ext>
+            </p:extLst>
+          </p:nvPr>
+        </p:nvGraphicFramePr>
+        <p:xfrm>
+          <a:off x="331074" y="1608080"/>
+          <a:ext cx="11524594" cy="4855782"/>
+        </p:xfrm>
+        <a:graphic>
+          <a:graphicData uri="http://schemas.openxmlformats.org/drawingml/2006/table">
+            <a:tbl>
+              <a:tblPr firstRow="1" bandRow="1">
+                <a:tableStyleId>{2D5ABB26-0587-4C30-8999-92F81FD0307C}</a:tableStyleId>
+              </a:tblPr>
+              <a:tblGrid>
+                <a:gridCol w="5762297">
+                  <a:extLst>
+                    <a:ext uri="{9D8B030D-6E8A-4147-A177-3AD203B41FA5}">
+                      <a16:colId xmlns:a16="http://schemas.microsoft.com/office/drawing/2014/main" val="2081857502"/>
+                    </a:ext>
+                  </a:extLst>
+                </a:gridCol>
+                <a:gridCol w="5762297">
+                  <a:extLst>
+                    <a:ext uri="{9D8B030D-6E8A-4147-A177-3AD203B41FA5}">
+                      <a16:colId xmlns:a16="http://schemas.microsoft.com/office/drawing/2014/main" val="4163045744"/>
+                    </a:ext>
+                  </a:extLst>
+                </a:gridCol>
+              </a:tblGrid>
+              <a:tr h="1194857">
+                <a:tc>
+                  <a:txBody>
+                    <a:bodyPr/>
+                    <a:lstStyle/>
+                    <a:p>
+                      <a:pPr marL="342900" marR="0" indent="-342900" algn="l" defTabSz="914400" rtl="0" eaLnBrk="1" fontAlgn="auto" latinLnBrk="0" hangingPunct="1">
+                        <a:lnSpc>
+                          <a:spcPct val="100000"/>
+                        </a:lnSpc>
+                        <a:spcBef>
+                          <a:spcPts val="0"/>
+                        </a:spcBef>
+                        <a:spcAft>
+                          <a:spcPts val="0"/>
+                        </a:spcAft>
+                        <a:buClrTx/>
+                        <a:buSzTx/>
+                        <a:buFont typeface="Arial" panose="020B0604020202020204" pitchFamily="34" charset="0"/>
+                        <a:buChar char="•"/>
+                        <a:tabLst/>
+                        <a:defRPr/>
+                      </a:pPr>
+                      <a:r>
+                        <a:rPr lang="ru-RU" sz="2400" dirty="0" smtClean="0">
+                          <a:solidFill>
+                            <a:schemeClr val="bg1"/>
+                          </a:solidFill>
+                          <a:latin typeface="Times New Roman" panose="02020603050405020304" pitchFamily="18" charset="0"/>
+                          <a:cs typeface="Times New Roman" panose="02020603050405020304" pitchFamily="18" charset="0"/>
+                        </a:rPr>
+                        <a:t>Хранение поле через массив указателей</a:t>
+                      </a:r>
+                    </a:p>
+                    <a:p>
+                      <a:pPr marL="342900" indent="-342900" algn="l">
+                        <a:buFont typeface="Arial" panose="020B0604020202020204" pitchFamily="34" charset="0"/>
+                        <a:buChar char="•"/>
+                      </a:pPr>
+                      <a:endParaRPr lang="ru-RU" sz="2400" dirty="0">
+                        <a:latin typeface="Times New Roman" panose="02020603050405020304" pitchFamily="18" charset="0"/>
+                        <a:cs typeface="Times New Roman" panose="02020603050405020304" pitchFamily="18" charset="0"/>
+                      </a:endParaRPr>
+                    </a:p>
+                  </a:txBody>
+                  <a:tcPr/>
+                </a:tc>
+                <a:tc>
+                  <a:txBody>
+                    <a:bodyPr/>
+                    <a:lstStyle/>
+                    <a:p>
+                      <a:pPr algn="l"/>
+                      <a:endParaRPr lang="ru-RU" sz="2400" dirty="0">
+                        <a:latin typeface="Times New Roman" panose="02020603050405020304" pitchFamily="18" charset="0"/>
+                        <a:cs typeface="Times New Roman" panose="02020603050405020304" pitchFamily="18" charset="0"/>
+                      </a:endParaRPr>
+                    </a:p>
+                  </a:txBody>
+                  <a:tcPr/>
+                </a:tc>
+                <a:extLst>
+                  <a:ext uri="{0D108BD9-81ED-4DB2-BD59-A6C34878D82A}">
+                    <a16:rowId xmlns:a16="http://schemas.microsoft.com/office/drawing/2014/main" val="2441657293"/>
+                  </a:ext>
+                </a:extLst>
+              </a:tr>
+              <a:tr h="1288812">
+                <a:tc>
+                  <a:txBody>
+                    <a:bodyPr/>
+                    <a:lstStyle/>
+                    <a:p>
+                      <a:pPr marL="342900" marR="0" indent="-342900" algn="l" defTabSz="914400" rtl="0" eaLnBrk="1" fontAlgn="auto" latinLnBrk="0" hangingPunct="1">
+                        <a:lnSpc>
+                          <a:spcPct val="100000"/>
+                        </a:lnSpc>
+                        <a:spcBef>
+                          <a:spcPts val="0"/>
+                        </a:spcBef>
+                        <a:spcAft>
+                          <a:spcPts val="0"/>
+                        </a:spcAft>
+                        <a:buClrTx/>
+                        <a:buSzTx/>
+                        <a:buFont typeface="Arial" panose="020B0604020202020204" pitchFamily="34" charset="0"/>
+                        <a:buChar char="•"/>
+                        <a:tabLst/>
+                        <a:defRPr/>
+                      </a:pPr>
+                      <a:r>
+                        <a:rPr lang="ru-RU" sz="2400" dirty="0" smtClean="0">
+                          <a:solidFill>
+                            <a:schemeClr val="bg1"/>
+                          </a:solidFill>
+                          <a:latin typeface="Times New Roman" panose="02020603050405020304" pitchFamily="18" charset="0"/>
+                          <a:cs typeface="Times New Roman" panose="02020603050405020304" pitchFamily="18" charset="0"/>
+                        </a:rPr>
+                        <a:t>Динамическое создание кораблей</a:t>
+                      </a:r>
+                    </a:p>
+                  </a:txBody>
+                  <a:tcPr/>
+                </a:tc>
+                <a:tc>
+                  <a:txBody>
+                    <a:bodyPr/>
+                    <a:lstStyle/>
+                    <a:p>
+                      <a:pPr algn="l"/>
+                      <a:endParaRPr lang="ru-RU" sz="2400" dirty="0">
+                        <a:latin typeface="Times New Roman" panose="02020603050405020304" pitchFamily="18" charset="0"/>
+                        <a:cs typeface="Times New Roman" panose="02020603050405020304" pitchFamily="18" charset="0"/>
+                      </a:endParaRPr>
+                    </a:p>
+                  </a:txBody>
+                  <a:tcPr/>
+                </a:tc>
+                <a:extLst>
+                  <a:ext uri="{0D108BD9-81ED-4DB2-BD59-A6C34878D82A}">
+                    <a16:rowId xmlns:a16="http://schemas.microsoft.com/office/drawing/2014/main" val="489831900"/>
+                  </a:ext>
+                </a:extLst>
+              </a:tr>
+              <a:tr h="2372113">
+                <a:tc>
+                  <a:txBody>
+                    <a:bodyPr/>
+                    <a:lstStyle/>
+                    <a:p>
+                      <a:pPr marL="342900" marR="0" indent="-342900" algn="l" defTabSz="914400" rtl="0" eaLnBrk="1" fontAlgn="auto" latinLnBrk="0" hangingPunct="1">
+                        <a:lnSpc>
+                          <a:spcPct val="100000"/>
+                        </a:lnSpc>
+                        <a:spcBef>
+                          <a:spcPts val="0"/>
+                        </a:spcBef>
+                        <a:spcAft>
+                          <a:spcPts val="0"/>
+                        </a:spcAft>
+                        <a:buClrTx/>
+                        <a:buSzTx/>
+                        <a:buFont typeface="Arial" panose="020B0604020202020204" pitchFamily="34" charset="0"/>
+                        <a:buChar char="•"/>
+                        <a:tabLst/>
+                        <a:defRPr/>
+                      </a:pPr>
+                      <a:r>
+                        <a:rPr lang="ru-RU" sz="2400" dirty="0" smtClean="0">
+                          <a:solidFill>
+                            <a:schemeClr val="bg1"/>
+                          </a:solidFill>
+                          <a:latin typeface="Times New Roman" panose="02020603050405020304" pitchFamily="18" charset="0"/>
+                          <a:cs typeface="Times New Roman" panose="02020603050405020304" pitchFamily="18" charset="0"/>
+                        </a:rPr>
+                        <a:t>Реализовал деструктор для освобождения памяти</a:t>
+                      </a:r>
+                    </a:p>
+                    <a:p>
+                      <a:pPr marL="342900" indent="-342900" algn="l">
+                        <a:buFont typeface="Arial" panose="020B0604020202020204" pitchFamily="34" charset="0"/>
+                        <a:buChar char="•"/>
+                      </a:pPr>
+                      <a:endParaRPr lang="ru-RU" sz="2400" dirty="0">
+                        <a:latin typeface="Times New Roman" panose="02020603050405020304" pitchFamily="18" charset="0"/>
+                        <a:cs typeface="Times New Roman" panose="02020603050405020304" pitchFamily="18" charset="0"/>
+                      </a:endParaRPr>
+                    </a:p>
+                  </a:txBody>
+                  <a:tcPr/>
+                </a:tc>
+                <a:tc>
+                  <a:txBody>
+                    <a:bodyPr/>
+                    <a:lstStyle/>
+                    <a:p>
+                      <a:pPr algn="l"/>
+                      <a:endParaRPr lang="ru-RU" sz="2400" dirty="0">
+                        <a:latin typeface="Times New Roman" panose="02020603050405020304" pitchFamily="18" charset="0"/>
+                        <a:cs typeface="Times New Roman" panose="02020603050405020304" pitchFamily="18" charset="0"/>
+                      </a:endParaRPr>
+                    </a:p>
+                  </a:txBody>
+                  <a:tcPr/>
+                </a:tc>
+                <a:extLst>
+                  <a:ext uri="{0D108BD9-81ED-4DB2-BD59-A6C34878D82A}">
+                    <a16:rowId xmlns:a16="http://schemas.microsoft.com/office/drawing/2014/main" val="3874804075"/>
+                  </a:ext>
+                </a:extLst>
+              </a:tr>
+            </a:tbl>
+          </a:graphicData>
+        </a:graphic>
+      </p:graphicFrame>
+      <p:pic>
+        <p:nvPicPr>
+          <p:cNvPr id="8" name="Рисунок 7"/>
+          <p:cNvPicPr>
+            <a:picLocks noChangeAspect="1"/>
+          </p:cNvPicPr>
+          <p:nvPr/>
+        </p:nvPicPr>
+        <p:blipFill>
+          <a:blip r:embed="rId3"/>
+          <a:stretch>
+            <a:fillRect/>
+          </a:stretch>
+        </p:blipFill>
+        <p:spPr>
+          <a:xfrm>
+            <a:off x="6910684" y="1942458"/>
+            <a:ext cx="4130298" cy="452133"/>
+          </a:xfrm>
+          <a:prstGeom prst="rect">
+            <a:avLst/>
+          </a:prstGeom>
+        </p:spPr>
+      </p:pic>
+      <p:pic>
+        <p:nvPicPr>
+          <p:cNvPr id="9" name="Рисунок 8"/>
+          <p:cNvPicPr>
+            <a:picLocks noChangeAspect="1"/>
+          </p:cNvPicPr>
+          <p:nvPr/>
+        </p:nvPicPr>
+        <p:blipFill>
+          <a:blip r:embed="rId4"/>
+          <a:stretch>
+            <a:fillRect/>
+          </a:stretch>
+        </p:blipFill>
+        <p:spPr>
+          <a:xfrm>
+            <a:off x="6093371" y="3005622"/>
+            <a:ext cx="5759668" cy="658224"/>
+          </a:xfrm>
+          <a:prstGeom prst="rect">
+            <a:avLst/>
+          </a:prstGeom>
+        </p:spPr>
+      </p:pic>
+      <p:pic>
+        <p:nvPicPr>
+          <p:cNvPr id="10" name="Рисунок 9"/>
+          <p:cNvPicPr>
+            <a:picLocks noChangeAspect="1"/>
+          </p:cNvPicPr>
+          <p:nvPr/>
+        </p:nvPicPr>
+        <p:blipFill>
+          <a:blip r:embed="rId5"/>
+          <a:stretch>
+            <a:fillRect/>
+          </a:stretch>
+        </p:blipFill>
+        <p:spPr>
+          <a:xfrm>
+            <a:off x="6096000" y="4083225"/>
+            <a:ext cx="5759668" cy="2128345"/>
+          </a:xfrm>
+          <a:prstGeom prst="rect">
+            <a:avLst/>
+          </a:prstGeom>
+        </p:spPr>
+      </p:pic>
     </p:spTree>
     <p:extLst>
       <p:ext uri="{BB962C8B-B14F-4D97-AF65-F5344CB8AC3E}">
-        <p14:creationId xmlns:p14="http://schemas.microsoft.com/office/powerpoint/2010/main" val="484110935"/>
+        <p14:creationId xmlns:p14="http://schemas.microsoft.com/office/powerpoint/2010/main" val="4220623366"/>
       </p:ext>
     </p:extLst>
   </p:cSld>

--- a/Морской бой на C++.pptx
+++ b/Морской бой на C++.pptx
@@ -9,6 +9,8 @@
     <p:sldId id="258" r:id="rId3"/>
     <p:sldId id="257" r:id="rId4"/>
     <p:sldId id="259" r:id="rId5"/>
+    <p:sldId id="261" r:id="rId6"/>
+    <p:sldId id="260" r:id="rId7"/>
   </p:sldIdLst>
   <p:sldSz cx="12192000" cy="6858000"/>
   <p:notesSz cx="6858000" cy="9144000"/>
@@ -168,10 +170,9 @@
           </a:lstStyle>
           <a:p>
             <a:r>
-              <a:rPr lang="ru-RU" smtClean="0"/>
+              <a:rPr lang="ru-RU"/>
               <a:t>Образец заголовка</a:t>
             </a:r>
-            <a:endParaRPr lang="ru-RU"/>
           </a:p>
         </p:txBody>
       </p:sp>
@@ -233,10 +234,9 @@
           </a:lstStyle>
           <a:p>
             <a:r>
-              <a:rPr lang="ru-RU" smtClean="0"/>
+              <a:rPr lang="ru-RU"/>
               <a:t>Образец подзаголовка</a:t>
             </a:r>
-            <a:endParaRPr lang="ru-RU"/>
           </a:p>
         </p:txBody>
       </p:sp>
@@ -351,10 +351,9 @@
           <a:lstStyle/>
           <a:p>
             <a:r>
-              <a:rPr lang="ru-RU" smtClean="0"/>
+              <a:rPr lang="ru-RU"/>
               <a:t>Образец заголовка</a:t>
             </a:r>
-            <a:endParaRPr lang="ru-RU"/>
           </a:p>
         </p:txBody>
       </p:sp>
@@ -375,38 +374,37 @@
           <a:p>
             <a:pPr lvl="0"/>
             <a:r>
-              <a:rPr lang="ru-RU" smtClean="0"/>
+              <a:rPr lang="ru-RU"/>
               <a:t>Образец текста</a:t>
             </a:r>
           </a:p>
           <a:p>
             <a:pPr lvl="1"/>
             <a:r>
-              <a:rPr lang="ru-RU" smtClean="0"/>
+              <a:rPr lang="ru-RU"/>
               <a:t>Второй уровень</a:t>
             </a:r>
           </a:p>
           <a:p>
             <a:pPr lvl="2"/>
             <a:r>
-              <a:rPr lang="ru-RU" smtClean="0"/>
+              <a:rPr lang="ru-RU"/>
               <a:t>Третий уровень</a:t>
             </a:r>
           </a:p>
           <a:p>
             <a:pPr lvl="3"/>
             <a:r>
-              <a:rPr lang="ru-RU" smtClean="0"/>
+              <a:rPr lang="ru-RU"/>
               <a:t>Четвертый уровень</a:t>
             </a:r>
           </a:p>
           <a:p>
             <a:pPr lvl="4"/>
             <a:r>
-              <a:rPr lang="ru-RU" smtClean="0"/>
+              <a:rPr lang="ru-RU"/>
               <a:t>Пятый уровень</a:t>
             </a:r>
-            <a:endParaRPr lang="ru-RU"/>
           </a:p>
         </p:txBody>
       </p:sp>
@@ -526,10 +524,9 @@
           <a:lstStyle/>
           <a:p>
             <a:r>
-              <a:rPr lang="ru-RU" smtClean="0"/>
+              <a:rPr lang="ru-RU"/>
               <a:t>Образец заголовка</a:t>
             </a:r>
-            <a:endParaRPr lang="ru-RU"/>
           </a:p>
         </p:txBody>
       </p:sp>
@@ -555,38 +552,37 @@
           <a:p>
             <a:pPr lvl="0"/>
             <a:r>
-              <a:rPr lang="ru-RU" smtClean="0"/>
+              <a:rPr lang="ru-RU"/>
               <a:t>Образец текста</a:t>
             </a:r>
           </a:p>
           <a:p>
             <a:pPr lvl="1"/>
             <a:r>
-              <a:rPr lang="ru-RU" smtClean="0"/>
+              <a:rPr lang="ru-RU"/>
               <a:t>Второй уровень</a:t>
             </a:r>
           </a:p>
           <a:p>
             <a:pPr lvl="2"/>
             <a:r>
-              <a:rPr lang="ru-RU" smtClean="0"/>
+              <a:rPr lang="ru-RU"/>
               <a:t>Третий уровень</a:t>
             </a:r>
           </a:p>
           <a:p>
             <a:pPr lvl="3"/>
             <a:r>
-              <a:rPr lang="ru-RU" smtClean="0"/>
+              <a:rPr lang="ru-RU"/>
               <a:t>Четвертый уровень</a:t>
             </a:r>
           </a:p>
           <a:p>
             <a:pPr lvl="4"/>
             <a:r>
-              <a:rPr lang="ru-RU" smtClean="0"/>
+              <a:rPr lang="ru-RU"/>
               <a:t>Пятый уровень</a:t>
             </a:r>
-            <a:endParaRPr lang="ru-RU"/>
           </a:p>
         </p:txBody>
       </p:sp>
@@ -701,10 +697,9 @@
           <a:lstStyle/>
           <a:p>
             <a:r>
-              <a:rPr lang="ru-RU" smtClean="0"/>
+              <a:rPr lang="ru-RU"/>
               <a:t>Образец заголовка</a:t>
             </a:r>
-            <a:endParaRPr lang="ru-RU"/>
           </a:p>
         </p:txBody>
       </p:sp>
@@ -725,38 +720,37 @@
           <a:p>
             <a:pPr lvl="0"/>
             <a:r>
-              <a:rPr lang="ru-RU" smtClean="0"/>
+              <a:rPr lang="ru-RU"/>
               <a:t>Образец текста</a:t>
             </a:r>
           </a:p>
           <a:p>
             <a:pPr lvl="1"/>
             <a:r>
-              <a:rPr lang="ru-RU" smtClean="0"/>
+              <a:rPr lang="ru-RU"/>
               <a:t>Второй уровень</a:t>
             </a:r>
           </a:p>
           <a:p>
             <a:pPr lvl="2"/>
             <a:r>
-              <a:rPr lang="ru-RU" smtClean="0"/>
+              <a:rPr lang="ru-RU"/>
               <a:t>Третий уровень</a:t>
             </a:r>
           </a:p>
           <a:p>
             <a:pPr lvl="3"/>
             <a:r>
-              <a:rPr lang="ru-RU" smtClean="0"/>
+              <a:rPr lang="ru-RU"/>
               <a:t>Четвертый уровень</a:t>
             </a:r>
           </a:p>
           <a:p>
             <a:pPr lvl="4"/>
             <a:r>
-              <a:rPr lang="ru-RU" smtClean="0"/>
+              <a:rPr lang="ru-RU"/>
               <a:t>Пятый уровень</a:t>
             </a:r>
-            <a:endParaRPr lang="ru-RU"/>
           </a:p>
         </p:txBody>
       </p:sp>
@@ -880,10 +874,9 @@
           </a:lstStyle>
           <a:p>
             <a:r>
-              <a:rPr lang="ru-RU" smtClean="0"/>
+              <a:rPr lang="ru-RU"/>
               <a:t>Образец заголовка</a:t>
             </a:r>
-            <a:endParaRPr lang="ru-RU"/>
           </a:p>
         </p:txBody>
       </p:sp>
@@ -1000,7 +993,7 @@
           <a:p>
             <a:pPr lvl="0"/>
             <a:r>
-              <a:rPr lang="ru-RU" smtClean="0"/>
+              <a:rPr lang="ru-RU"/>
               <a:t>Образец текста</a:t>
             </a:r>
           </a:p>
@@ -1117,10 +1110,9 @@
           <a:lstStyle/>
           <a:p>
             <a:r>
-              <a:rPr lang="ru-RU" smtClean="0"/>
+              <a:rPr lang="ru-RU"/>
               <a:t>Образец заголовка</a:t>
             </a:r>
-            <a:endParaRPr lang="ru-RU"/>
           </a:p>
         </p:txBody>
       </p:sp>
@@ -1146,38 +1138,37 @@
           <a:p>
             <a:pPr lvl="0"/>
             <a:r>
-              <a:rPr lang="ru-RU" smtClean="0"/>
+              <a:rPr lang="ru-RU"/>
               <a:t>Образец текста</a:t>
             </a:r>
           </a:p>
           <a:p>
             <a:pPr lvl="1"/>
             <a:r>
-              <a:rPr lang="ru-RU" smtClean="0"/>
+              <a:rPr lang="ru-RU"/>
               <a:t>Второй уровень</a:t>
             </a:r>
           </a:p>
           <a:p>
             <a:pPr lvl="2"/>
             <a:r>
-              <a:rPr lang="ru-RU" smtClean="0"/>
+              <a:rPr lang="ru-RU"/>
               <a:t>Третий уровень</a:t>
             </a:r>
           </a:p>
           <a:p>
             <a:pPr lvl="3"/>
             <a:r>
-              <a:rPr lang="ru-RU" smtClean="0"/>
+              <a:rPr lang="ru-RU"/>
               <a:t>Четвертый уровень</a:t>
             </a:r>
           </a:p>
           <a:p>
             <a:pPr lvl="4"/>
             <a:r>
-              <a:rPr lang="ru-RU" smtClean="0"/>
+              <a:rPr lang="ru-RU"/>
               <a:t>Пятый уровень</a:t>
             </a:r>
-            <a:endParaRPr lang="ru-RU"/>
           </a:p>
         </p:txBody>
       </p:sp>
@@ -1203,38 +1194,37 @@
           <a:p>
             <a:pPr lvl="0"/>
             <a:r>
-              <a:rPr lang="ru-RU" smtClean="0"/>
+              <a:rPr lang="ru-RU"/>
               <a:t>Образец текста</a:t>
             </a:r>
           </a:p>
           <a:p>
             <a:pPr lvl="1"/>
             <a:r>
-              <a:rPr lang="ru-RU" smtClean="0"/>
+              <a:rPr lang="ru-RU"/>
               <a:t>Второй уровень</a:t>
             </a:r>
           </a:p>
           <a:p>
             <a:pPr lvl="2"/>
             <a:r>
-              <a:rPr lang="ru-RU" smtClean="0"/>
+              <a:rPr lang="ru-RU"/>
               <a:t>Третий уровень</a:t>
             </a:r>
           </a:p>
           <a:p>
             <a:pPr lvl="3"/>
             <a:r>
-              <a:rPr lang="ru-RU" smtClean="0"/>
+              <a:rPr lang="ru-RU"/>
               <a:t>Четвертый уровень</a:t>
             </a:r>
           </a:p>
           <a:p>
             <a:pPr lvl="4"/>
             <a:r>
-              <a:rPr lang="ru-RU" smtClean="0"/>
+              <a:rPr lang="ru-RU"/>
               <a:t>Пятый уровень</a:t>
             </a:r>
-            <a:endParaRPr lang="ru-RU"/>
           </a:p>
         </p:txBody>
       </p:sp>
@@ -1354,10 +1344,9 @@
           <a:lstStyle/>
           <a:p>
             <a:r>
-              <a:rPr lang="ru-RU" smtClean="0"/>
+              <a:rPr lang="ru-RU"/>
               <a:t>Образец заголовка</a:t>
             </a:r>
-            <a:endParaRPr lang="ru-RU"/>
           </a:p>
         </p:txBody>
       </p:sp>
@@ -1420,7 +1409,7 @@
           <a:p>
             <a:pPr lvl="0"/>
             <a:r>
-              <a:rPr lang="ru-RU" smtClean="0"/>
+              <a:rPr lang="ru-RU"/>
               <a:t>Образец текста</a:t>
             </a:r>
           </a:p>
@@ -1448,38 +1437,37 @@
           <a:p>
             <a:pPr lvl="0"/>
             <a:r>
-              <a:rPr lang="ru-RU" smtClean="0"/>
+              <a:rPr lang="ru-RU"/>
               <a:t>Образец текста</a:t>
             </a:r>
           </a:p>
           <a:p>
             <a:pPr lvl="1"/>
             <a:r>
-              <a:rPr lang="ru-RU" smtClean="0"/>
+              <a:rPr lang="ru-RU"/>
               <a:t>Второй уровень</a:t>
             </a:r>
           </a:p>
           <a:p>
             <a:pPr lvl="2"/>
             <a:r>
-              <a:rPr lang="ru-RU" smtClean="0"/>
+              <a:rPr lang="ru-RU"/>
               <a:t>Третий уровень</a:t>
             </a:r>
           </a:p>
           <a:p>
             <a:pPr lvl="3"/>
             <a:r>
-              <a:rPr lang="ru-RU" smtClean="0"/>
+              <a:rPr lang="ru-RU"/>
               <a:t>Четвертый уровень</a:t>
             </a:r>
           </a:p>
           <a:p>
             <a:pPr lvl="4"/>
             <a:r>
-              <a:rPr lang="ru-RU" smtClean="0"/>
+              <a:rPr lang="ru-RU"/>
               <a:t>Пятый уровень</a:t>
             </a:r>
-            <a:endParaRPr lang="ru-RU"/>
           </a:p>
         </p:txBody>
       </p:sp>
@@ -1542,7 +1530,7 @@
           <a:p>
             <a:pPr lvl="0"/>
             <a:r>
-              <a:rPr lang="ru-RU" smtClean="0"/>
+              <a:rPr lang="ru-RU"/>
               <a:t>Образец текста</a:t>
             </a:r>
           </a:p>
@@ -1570,38 +1558,37 @@
           <a:p>
             <a:pPr lvl="0"/>
             <a:r>
-              <a:rPr lang="ru-RU" smtClean="0"/>
+              <a:rPr lang="ru-RU"/>
               <a:t>Образец текста</a:t>
             </a:r>
           </a:p>
           <a:p>
             <a:pPr lvl="1"/>
             <a:r>
-              <a:rPr lang="ru-RU" smtClean="0"/>
+              <a:rPr lang="ru-RU"/>
               <a:t>Второй уровень</a:t>
             </a:r>
           </a:p>
           <a:p>
             <a:pPr lvl="2"/>
             <a:r>
-              <a:rPr lang="ru-RU" smtClean="0"/>
+              <a:rPr lang="ru-RU"/>
               <a:t>Третий уровень</a:t>
             </a:r>
           </a:p>
           <a:p>
             <a:pPr lvl="3"/>
             <a:r>
-              <a:rPr lang="ru-RU" smtClean="0"/>
+              <a:rPr lang="ru-RU"/>
               <a:t>Четвертый уровень</a:t>
             </a:r>
           </a:p>
           <a:p>
             <a:pPr lvl="4"/>
             <a:r>
-              <a:rPr lang="ru-RU" smtClean="0"/>
+              <a:rPr lang="ru-RU"/>
               <a:t>Пятый уровень</a:t>
             </a:r>
-            <a:endParaRPr lang="ru-RU"/>
           </a:p>
         </p:txBody>
       </p:sp>
@@ -1716,10 +1703,9 @@
           <a:lstStyle/>
           <a:p>
             <a:r>
-              <a:rPr lang="ru-RU" smtClean="0"/>
+              <a:rPr lang="ru-RU"/>
               <a:t>Образец заголовка</a:t>
             </a:r>
-            <a:endParaRPr lang="ru-RU"/>
           </a:p>
         </p:txBody>
       </p:sp>
@@ -1938,10 +1924,9 @@
           </a:lstStyle>
           <a:p>
             <a:r>
-              <a:rPr lang="ru-RU" smtClean="0"/>
+              <a:rPr lang="ru-RU"/>
               <a:t>Образец заголовка</a:t>
             </a:r>
-            <a:endParaRPr lang="ru-RU"/>
           </a:p>
         </p:txBody>
       </p:sp>
@@ -1995,38 +1980,37 @@
           <a:p>
             <a:pPr lvl="0"/>
             <a:r>
-              <a:rPr lang="ru-RU" smtClean="0"/>
+              <a:rPr lang="ru-RU"/>
               <a:t>Образец текста</a:t>
             </a:r>
           </a:p>
           <a:p>
             <a:pPr lvl="1"/>
             <a:r>
-              <a:rPr lang="ru-RU" smtClean="0"/>
+              <a:rPr lang="ru-RU"/>
               <a:t>Второй уровень</a:t>
             </a:r>
           </a:p>
           <a:p>
             <a:pPr lvl="2"/>
             <a:r>
-              <a:rPr lang="ru-RU" smtClean="0"/>
+              <a:rPr lang="ru-RU"/>
               <a:t>Третий уровень</a:t>
             </a:r>
           </a:p>
           <a:p>
             <a:pPr lvl="3"/>
             <a:r>
-              <a:rPr lang="ru-RU" smtClean="0"/>
+              <a:rPr lang="ru-RU"/>
               <a:t>Четвертый уровень</a:t>
             </a:r>
           </a:p>
           <a:p>
             <a:pPr lvl="4"/>
             <a:r>
-              <a:rPr lang="ru-RU" smtClean="0"/>
+              <a:rPr lang="ru-RU"/>
               <a:t>Пятый уровень</a:t>
             </a:r>
-            <a:endParaRPr lang="ru-RU"/>
           </a:p>
         </p:txBody>
       </p:sp>
@@ -2089,7 +2073,7 @@
           <a:p>
             <a:pPr lvl="0"/>
             <a:r>
-              <a:rPr lang="ru-RU" smtClean="0"/>
+              <a:rPr lang="ru-RU"/>
               <a:t>Образец текста</a:t>
             </a:r>
           </a:p>
@@ -2215,10 +2199,9 @@
           </a:lstStyle>
           <a:p>
             <a:r>
-              <a:rPr lang="ru-RU" smtClean="0"/>
+              <a:rPr lang="ru-RU"/>
               <a:t>Образец заголовка</a:t>
             </a:r>
-            <a:endParaRPr lang="ru-RU"/>
           </a:p>
         </p:txBody>
       </p:sp>
@@ -2342,7 +2325,7 @@
           <a:p>
             <a:pPr lvl="0"/>
             <a:r>
-              <a:rPr lang="ru-RU" smtClean="0"/>
+              <a:rPr lang="ru-RU"/>
               <a:t>Образец текста</a:t>
             </a:r>
           </a:p>
@@ -2474,10 +2457,9 @@
           <a:lstStyle/>
           <a:p>
             <a:r>
-              <a:rPr lang="ru-RU" smtClean="0"/>
+              <a:rPr lang="ru-RU"/>
               <a:t>Образец заголовка</a:t>
             </a:r>
-            <a:endParaRPr lang="ru-RU"/>
           </a:p>
         </p:txBody>
       </p:sp>
@@ -2508,38 +2490,37 @@
           <a:p>
             <a:pPr lvl="0"/>
             <a:r>
-              <a:rPr lang="ru-RU" smtClean="0"/>
+              <a:rPr lang="ru-RU"/>
               <a:t>Образец текста</a:t>
             </a:r>
           </a:p>
           <a:p>
             <a:pPr lvl="1"/>
             <a:r>
-              <a:rPr lang="ru-RU" smtClean="0"/>
+              <a:rPr lang="ru-RU"/>
               <a:t>Второй уровень</a:t>
             </a:r>
           </a:p>
           <a:p>
             <a:pPr lvl="2"/>
             <a:r>
-              <a:rPr lang="ru-RU" smtClean="0"/>
+              <a:rPr lang="ru-RU"/>
               <a:t>Третий уровень</a:t>
             </a:r>
           </a:p>
           <a:p>
             <a:pPr lvl="3"/>
             <a:r>
-              <a:rPr lang="ru-RU" smtClean="0"/>
+              <a:rPr lang="ru-RU"/>
               <a:t>Четвертый уровень</a:t>
             </a:r>
           </a:p>
           <a:p>
             <a:pPr lvl="4"/>
             <a:r>
-              <a:rPr lang="ru-RU" smtClean="0"/>
+              <a:rPr lang="ru-RU"/>
               <a:t>Пятый уровень</a:t>
             </a:r>
-            <a:endParaRPr lang="ru-RU"/>
           </a:p>
         </p:txBody>
       </p:sp>
@@ -3040,7 +3021,7 @@
           <a:lstStyle/>
           <a:p>
             <a:r>
-              <a:rPr lang="ru-RU" dirty="0" smtClean="0">
+              <a:rPr lang="ru-RU" dirty="0">
                 <a:solidFill>
                   <a:schemeClr val="bg1"/>
                 </a:solidFill>
@@ -3050,7 +3031,7 @@
               <a:t>Морской бой на </a:t>
             </a:r>
             <a:r>
-              <a:rPr lang="en-US" dirty="0" smtClean="0">
+              <a:rPr lang="en-US" dirty="0">
                 <a:solidFill>
                   <a:schemeClr val="bg1"/>
                 </a:solidFill>
@@ -3117,7 +3098,7 @@
           <a:p>
             <a:pPr algn="l"/>
             <a:r>
-              <a:rPr lang="ru-RU" sz="2800" dirty="0" smtClean="0">
+              <a:rPr lang="ru-RU" sz="2800" dirty="0">
                 <a:solidFill>
                   <a:schemeClr val="bg1"/>
                 </a:solidFill>
@@ -3130,47 +3111,73 @@
           <a:p>
             <a:pPr algn="l"/>
             <a:r>
-              <a:rPr lang="ru-RU" sz="2800" dirty="0" smtClean="0">
+              <a:rPr lang="ru-RU" sz="2800" dirty="0">
                 <a:solidFill>
                   <a:schemeClr val="bg1"/>
                 </a:solidFill>
                 <a:latin typeface="Times New Roman" panose="02020603050405020304" pitchFamily="18" charset="0"/>
                 <a:cs typeface="Times New Roman" panose="02020603050405020304" pitchFamily="18" charset="0"/>
               </a:rPr>
-              <a:t>Участники: </a:t>
-            </a:r>
-            <a:r>
-              <a:rPr lang="ru-RU" sz="2800" dirty="0" smtClean="0">
+              <a:t>Участники: Кириченко И.А. </a:t>
+            </a:r>
+          </a:p>
+          <a:p>
+            <a:pPr algn="l"/>
+            <a:r>
+              <a:rPr lang="ru-RU" sz="2800" dirty="0">
                 <a:solidFill>
                   <a:schemeClr val="bg1"/>
                 </a:solidFill>
                 <a:latin typeface="Times New Roman" panose="02020603050405020304" pitchFamily="18" charset="0"/>
                 <a:cs typeface="Times New Roman" panose="02020603050405020304" pitchFamily="18" charset="0"/>
               </a:rPr>
-              <a:t>Кириченко И.А. </a:t>
-            </a:r>
-            <a:r>
-              <a:rPr lang="ru-RU" sz="2800" dirty="0" smtClean="0">
+              <a:t>Ваньков</a:t>
+            </a:r>
+            <a:r>
+              <a:rPr lang="en-US" sz="2800" dirty="0">
                 <a:solidFill>
-                  <a:srgbClr val="FF0000"/>
+                  <a:schemeClr val="bg1"/>
                 </a:solidFill>
                 <a:latin typeface="Times New Roman" panose="02020603050405020304" pitchFamily="18" charset="0"/>
                 <a:cs typeface="Times New Roman" panose="02020603050405020304" pitchFamily="18" charset="0"/>
               </a:rPr>
-              <a:t>(сюда впишите себя)</a:t>
-            </a:r>
-            <a:endParaRPr lang="ru-RU" sz="2800" dirty="0" smtClean="0">
-              <a:solidFill>
-                <a:srgbClr val="FF0000"/>
-              </a:solidFill>
-              <a:latin typeface="Times New Roman" panose="02020603050405020304" pitchFamily="18" charset="0"/>
-              <a:cs typeface="Times New Roman" panose="02020603050405020304" pitchFamily="18" charset="0"/>
-            </a:endParaRPr>
+              <a:t> </a:t>
+            </a:r>
+            <a:r>
+              <a:rPr lang="ru-RU" sz="2800" dirty="0">
+                <a:solidFill>
+                  <a:schemeClr val="bg1"/>
+                </a:solidFill>
+                <a:latin typeface="Times New Roman" panose="02020603050405020304" pitchFamily="18" charset="0"/>
+                <a:cs typeface="Times New Roman" panose="02020603050405020304" pitchFamily="18" charset="0"/>
+              </a:rPr>
+              <a:t>П</a:t>
+            </a:r>
+            <a:r>
+              <a:rPr lang="en-US" sz="2800" dirty="0">
+                <a:solidFill>
+                  <a:schemeClr val="bg1"/>
+                </a:solidFill>
+                <a:latin typeface="Times New Roman" panose="02020603050405020304" pitchFamily="18" charset="0"/>
+                <a:cs typeface="Times New Roman" panose="02020603050405020304" pitchFamily="18" charset="0"/>
+              </a:rPr>
+              <a:t>.</a:t>
+            </a:r>
+            <a:r>
+              <a:rPr lang="ru-RU" sz="2800" dirty="0">
+                <a:solidFill>
+                  <a:schemeClr val="bg1"/>
+                </a:solidFill>
+                <a:latin typeface="Times New Roman" panose="02020603050405020304" pitchFamily="18" charset="0"/>
+                <a:cs typeface="Times New Roman" panose="02020603050405020304" pitchFamily="18" charset="0"/>
+              </a:rPr>
+              <a:t>Н</a:t>
+            </a:r>
           </a:p>
           <a:p>
             <a:pPr algn="l"/>
             <a:r>
-              <a:rPr lang="ru-RU" sz="2800" dirty="0" smtClean="0">
+              <a:rPr lang="ru-RU" sz="2800" dirty="0">
                 <a:solidFill>
                   <a:schemeClr val="bg1"/>
                 </a:solidFill>
@@ -3183,7 +3190,7 @@
           <a:p>
             <a:pPr algn="l"/>
             <a:r>
-              <a:rPr lang="ru-RU" sz="2800" dirty="0" smtClean="0">
+              <a:rPr lang="ru-RU" sz="2800" dirty="0">
                 <a:solidFill>
                   <a:schemeClr val="bg1"/>
                 </a:solidFill>
@@ -3192,13 +3199,6 @@
               </a:rPr>
               <a:t>Год: 2026</a:t>
             </a:r>
-            <a:endParaRPr lang="ru-RU" sz="2800" dirty="0">
-              <a:solidFill>
-                <a:schemeClr val="bg1"/>
-              </a:solidFill>
-              <a:latin typeface="Times New Roman" panose="02020603050405020304" pitchFamily="18" charset="0"/>
-              <a:cs typeface="Times New Roman" panose="02020603050405020304" pitchFamily="18" charset="0"/>
-            </a:endParaRPr>
           </a:p>
         </p:txBody>
       </p:sp>
@@ -3236,13 +3236,6 @@
   <p:clrMapOvr>
     <a:masterClrMapping/>
   </p:clrMapOvr>
-  <p:timing>
-    <p:tnLst>
-      <p:par>
-        <p:cTn id="1" dur="indefinite" restart="never" nodeType="tmRoot"/>
-      </p:par>
-    </p:tnLst>
-  </p:timing>
 </p:sld>
 </file>
 
@@ -3322,7 +3315,7 @@
           <a:lstStyle/>
           <a:p>
             <a:r>
-              <a:rPr lang="ru-RU" sz="3600" dirty="0" smtClean="0">
+              <a:rPr lang="ru-RU" sz="3600" dirty="0">
                 <a:solidFill>
                   <a:schemeClr val="bg1"/>
                 </a:solidFill>
@@ -3387,7 +3380,7 @@
           <a:p>
             <a:pPr algn="ctr"/>
             <a:r>
-              <a:rPr lang="ru-RU" sz="2800" b="0" dirty="0" smtClean="0">
+              <a:rPr lang="ru-RU" sz="2800" b="0" dirty="0">
                 <a:solidFill>
                   <a:schemeClr val="bg1"/>
                 </a:solidFill>
@@ -3454,7 +3447,7 @@
           <a:p>
             <a:pPr algn="ctr"/>
             <a:r>
-              <a:rPr lang="ru-RU" sz="2800" b="0" dirty="0" smtClean="0">
+              <a:rPr lang="ru-RU" sz="2800" b="0" dirty="0">
                 <a:solidFill>
                   <a:schemeClr val="bg1"/>
                 </a:solidFill>
@@ -3464,7 +3457,7 @@
               <a:t>Кто</a:t>
             </a:r>
             <a:r>
-              <a:rPr lang="ru-RU" sz="2800" dirty="0" smtClean="0">
+              <a:rPr lang="ru-RU" sz="2800" dirty="0">
                 <a:solidFill>
                   <a:schemeClr val="bg1"/>
                 </a:solidFill>
@@ -3474,7 +3467,7 @@
               <a:t> </a:t>
             </a:r>
             <a:r>
-              <a:rPr lang="ru-RU" sz="2800" b="0" dirty="0" smtClean="0">
+              <a:rPr lang="ru-RU" sz="2800" b="0" dirty="0">
                 <a:solidFill>
                   <a:schemeClr val="bg1"/>
                 </a:solidFill>
@@ -3483,13 +3476,6 @@
               </a:rPr>
               <a:t>реализовывал</a:t>
             </a:r>
-            <a:endParaRPr lang="ru-RU" sz="2800" b="0" dirty="0">
-              <a:solidFill>
-                <a:schemeClr val="bg1"/>
-              </a:solidFill>
-              <a:latin typeface="Times New Roman" panose="02020603050405020304" pitchFamily="18" charset="0"/>
-              <a:cs typeface="Times New Roman" panose="02020603050405020304" pitchFamily="18" charset="0"/>
-            </a:endParaRPr>
           </a:p>
         </p:txBody>
       </p:sp>
@@ -3502,7 +3488,7 @@
           <p:nvPr>
             <p:extLst>
               <p:ext uri="{D42A27DB-BD31-4B8C-83A1-F6EECF244321}">
-                <p14:modId xmlns:p14="http://schemas.microsoft.com/office/powerpoint/2010/main" val="4095797706"/>
+                <p14:modId xmlns:p14="http://schemas.microsoft.com/office/powerpoint/2010/main" val="588100128"/>
               </p:ext>
             </p:extLst>
           </p:nvPr>
@@ -3541,7 +3527,7 @@
                     <a:p>
                       <a:pPr algn="ctr"/>
                       <a:r>
-                        <a:rPr lang="ru-RU" sz="2400" dirty="0" smtClean="0">
+                        <a:rPr lang="ru-RU" sz="2400" dirty="0">
                           <a:solidFill>
                             <a:schemeClr val="bg1"/>
                           </a:solidFill>
@@ -3551,7 +3537,7 @@
                         <a:t>Расстановка</a:t>
                       </a:r>
                       <a:r>
-                        <a:rPr lang="ru-RU" sz="2400" baseline="0" dirty="0" smtClean="0">
+                        <a:rPr lang="ru-RU" sz="2400" baseline="0" dirty="0">
                           <a:solidFill>
                             <a:schemeClr val="bg1"/>
                           </a:solidFill>
@@ -3578,7 +3564,7 @@
                     <a:p>
                       <a:pPr algn="ctr"/>
                       <a:r>
-                        <a:rPr lang="ru-RU" sz="2400" dirty="0" smtClean="0">
+                        <a:rPr lang="ru-RU" sz="2400" dirty="0">
                           <a:solidFill>
                             <a:schemeClr val="bg1"/>
                           </a:solidFill>
@@ -3587,13 +3573,6 @@
                         </a:rPr>
                         <a:t>Кириченко Илья</a:t>
                       </a:r>
-                      <a:endParaRPr lang="ru-RU" sz="2400" dirty="0">
-                        <a:solidFill>
-                          <a:schemeClr val="bg1"/>
-                        </a:solidFill>
-                        <a:latin typeface="Times New Roman" panose="02020603050405020304" pitchFamily="18" charset="0"/>
-                        <a:cs typeface="Times New Roman" panose="02020603050405020304" pitchFamily="18" charset="0"/>
-                      </a:endParaRPr>
                     </a:p>
                   </a:txBody>
                   <a:tcPr/>
@@ -3612,7 +3591,7 @@
                     <a:p>
                       <a:pPr algn="ctr"/>
                       <a:r>
-                        <a:rPr lang="ru-RU" sz="2400" dirty="0" smtClean="0">
+                        <a:rPr lang="ru-RU" sz="2400" dirty="0">
                           <a:solidFill>
                             <a:schemeClr val="bg1"/>
                           </a:solidFill>
@@ -3622,14 +3601,14 @@
                         <a:t>Реализация</a:t>
                       </a:r>
                       <a:r>
-                        <a:rPr lang="ru-RU" sz="2400" baseline="0" dirty="0" smtClean="0">
+                        <a:rPr lang="ru-RU" sz="2400" baseline="0" dirty="0">
                           <a:solidFill>
                             <a:schemeClr val="bg1"/>
                           </a:solidFill>
                           <a:latin typeface="Times New Roman" panose="02020603050405020304" pitchFamily="18" charset="0"/>
                           <a:cs typeface="Times New Roman" panose="02020603050405020304" pitchFamily="18" charset="0"/>
                         </a:rPr>
-                        <a:t> боя с ботом</a:t>
+                        <a:t> боя</a:t>
                       </a:r>
                       <a:endParaRPr lang="ru-RU" sz="2400" dirty="0">
                         <a:solidFill>
@@ -3649,7 +3628,7 @@
                     <a:p>
                       <a:pPr algn="ctr"/>
                       <a:r>
-                        <a:rPr lang="ru-RU" sz="2400" dirty="0" smtClean="0">
+                        <a:rPr lang="ru-RU" sz="2400" dirty="0">
                           <a:solidFill>
                             <a:schemeClr val="bg1"/>
                           </a:solidFill>
@@ -3658,13 +3637,6 @@
                         </a:rPr>
                         <a:t>Ваньков Павел</a:t>
                       </a:r>
-                      <a:endParaRPr lang="ru-RU" sz="2400" dirty="0">
-                        <a:solidFill>
-                          <a:schemeClr val="bg1"/>
-                        </a:solidFill>
-                        <a:latin typeface="Times New Roman" panose="02020603050405020304" pitchFamily="18" charset="0"/>
-                        <a:cs typeface="Times New Roman" panose="02020603050405020304" pitchFamily="18" charset="0"/>
-                      </a:endParaRPr>
                     </a:p>
                   </a:txBody>
                   <a:tcPr/>
@@ -3683,22 +3655,15 @@
                     <a:p>
                       <a:pPr algn="ctr"/>
                       <a:r>
-                        <a:rPr lang="ru-RU" sz="2400" dirty="0" smtClean="0">
+                        <a:rPr lang="ru-RU" sz="2400" dirty="0">
                           <a:solidFill>
                             <a:schemeClr val="bg1"/>
                           </a:solidFill>
                           <a:latin typeface="Times New Roman" panose="02020603050405020304" pitchFamily="18" charset="0"/>
                           <a:cs typeface="Times New Roman" panose="02020603050405020304" pitchFamily="18" charset="0"/>
                         </a:rPr>
-                        <a:t>Внедрение потоков синхронизации</a:t>
+                        <a:t>Внедрение потоков и синхронизации</a:t>
                       </a:r>
-                      <a:endParaRPr lang="ru-RU" sz="2400" dirty="0">
-                        <a:solidFill>
-                          <a:schemeClr val="bg1"/>
-                        </a:solidFill>
-                        <a:latin typeface="Times New Roman" panose="02020603050405020304" pitchFamily="18" charset="0"/>
-                        <a:cs typeface="Times New Roman" panose="02020603050405020304" pitchFamily="18" charset="0"/>
-                      </a:endParaRPr>
                     </a:p>
                   </a:txBody>
                   <a:tcPr/>
@@ -3710,7 +3675,7 @@
                     <a:p>
                       <a:pPr algn="ctr"/>
                       <a:r>
-                        <a:rPr lang="ru-RU" sz="2400" dirty="0" smtClean="0">
+                        <a:rPr lang="ru-RU" sz="2400" dirty="0">
                           <a:solidFill>
                             <a:schemeClr val="bg1"/>
                           </a:solidFill>
@@ -3719,13 +3684,6 @@
                         </a:rPr>
                         <a:t>Ситков Даниил</a:t>
                       </a:r>
-                      <a:endParaRPr lang="ru-RU" sz="2400" dirty="0">
-                        <a:solidFill>
-                          <a:schemeClr val="bg1"/>
-                        </a:solidFill>
-                        <a:latin typeface="Times New Roman" panose="02020603050405020304" pitchFamily="18" charset="0"/>
-                        <a:cs typeface="Times New Roman" panose="02020603050405020304" pitchFamily="18" charset="0"/>
-                      </a:endParaRPr>
                     </a:p>
                   </a:txBody>
                   <a:tcPr/>
@@ -3750,13 +3708,6 @@
   <p:clrMapOvr>
     <a:masterClrMapping/>
   </p:clrMapOvr>
-  <p:timing>
-    <p:tnLst>
-      <p:par>
-        <p:cTn id="1" dur="indefinite" restart="never" nodeType="tmRoot"/>
-      </p:par>
-    </p:tnLst>
-  </p:timing>
 </p:sld>
 </file>
 
@@ -3836,7 +3787,7 @@
           <a:lstStyle/>
           <a:p>
             <a:r>
-              <a:rPr lang="ru-RU" sz="3600" dirty="0" smtClean="0">
+              <a:rPr lang="ru-RU" sz="3600" dirty="0">
                 <a:solidFill>
                   <a:schemeClr val="bg1"/>
                 </a:solidFill>
@@ -3845,13 +3796,6 @@
               </a:rPr>
               <a:t>Постановка задачи и требования</a:t>
             </a:r>
-            <a:endParaRPr lang="ru-RU" sz="3600" dirty="0">
-              <a:solidFill>
-                <a:schemeClr val="bg1"/>
-              </a:solidFill>
-              <a:latin typeface="Times New Roman" panose="02020603050405020304" pitchFamily="18" charset="0"/>
-              <a:cs typeface="Times New Roman" panose="02020603050405020304" pitchFamily="18" charset="0"/>
-            </a:endParaRPr>
           </a:p>
         </p:txBody>
       </p:sp>
@@ -3878,18 +3822,13 @@
           <a:lstStyle/>
           <a:p>
             <a:r>
-              <a:rPr lang="ru-RU" sz="3600" dirty="0" smtClean="0">
+              <a:rPr lang="ru-RU" sz="3600" dirty="0">
                 <a:solidFill>
                   <a:srgbClr val="FF0000"/>
                 </a:solidFill>
               </a:rPr>
               <a:t>Добавьте скрины примеров  используемого кода</a:t>
             </a:r>
-            <a:endParaRPr lang="ru-RU" sz="3600" dirty="0">
-              <a:solidFill>
-                <a:srgbClr val="FF0000"/>
-              </a:solidFill>
-            </a:endParaRPr>
           </a:p>
         </p:txBody>
       </p:sp>
@@ -3902,7 +3841,7 @@
           <p:nvPr>
             <p:extLst>
               <p:ext uri="{D42A27DB-BD31-4B8C-83A1-F6EECF244321}">
-                <p14:modId xmlns:p14="http://schemas.microsoft.com/office/powerpoint/2010/main" val="1027386015"/>
+                <p14:modId xmlns:p14="http://schemas.microsoft.com/office/powerpoint/2010/main" val="4256519509"/>
               </p:ext>
             </p:extLst>
           </p:nvPr>
@@ -3944,7 +3883,7 @@
                         <a:buChar char="•"/>
                       </a:pPr>
                       <a:r>
-                        <a:rPr lang="ru-RU" sz="2400" dirty="0" smtClean="0">
+                        <a:rPr lang="ru-RU" sz="2400" dirty="0">
                           <a:solidFill>
                             <a:schemeClr val="bg1"/>
                           </a:solidFill>
@@ -3953,13 +3892,6 @@
                         </a:rPr>
                         <a:t>Работа с динамической памятью (указатели)</a:t>
                       </a:r>
-                      <a:endParaRPr lang="ru-RU" sz="2400" dirty="0" smtClean="0">
-                        <a:solidFill>
-                          <a:schemeClr val="bg1"/>
-                        </a:solidFill>
-                        <a:latin typeface="Times New Roman" panose="02020603050405020304" pitchFamily="18" charset="0"/>
-                        <a:cs typeface="Times New Roman" panose="02020603050405020304" pitchFamily="18" charset="0"/>
-                      </a:endParaRPr>
                     </a:p>
                   </a:txBody>
                   <a:tcPr/>
@@ -3998,7 +3930,7 @@
                         <a:buChar char="•"/>
                       </a:pPr>
                       <a:r>
-                        <a:rPr lang="ru-RU" sz="2400" dirty="0" smtClean="0">
+                        <a:rPr lang="ru-RU" sz="2400" dirty="0">
                           <a:solidFill>
                             <a:schemeClr val="bg1"/>
                           </a:solidFill>
@@ -4007,13 +3939,6 @@
                         </a:rPr>
                         <a:t>Многопоточность (потоки)</a:t>
                       </a:r>
-                      <a:endParaRPr lang="ru-RU" sz="2400" dirty="0" smtClean="0">
-                        <a:solidFill>
-                          <a:schemeClr val="bg1"/>
-                        </a:solidFill>
-                        <a:latin typeface="Times New Roman" panose="02020603050405020304" pitchFamily="18" charset="0"/>
-                        <a:cs typeface="Times New Roman" panose="02020603050405020304" pitchFamily="18" charset="0"/>
-                      </a:endParaRPr>
                     </a:p>
                   </a:txBody>
                   <a:tcPr/>
@@ -4052,22 +3977,35 @@
                         <a:buChar char="•"/>
                       </a:pPr>
                       <a:r>
-                        <a:rPr lang="ru-RU" sz="2400" dirty="0" smtClean="0">
+                        <a:rPr lang="ru-RU" sz="2400" dirty="0">
                           <a:solidFill>
                             <a:schemeClr val="bg1"/>
                           </a:solidFill>
                           <a:latin typeface="Times New Roman" panose="02020603050405020304" pitchFamily="18" charset="0"/>
                           <a:cs typeface="Times New Roman" panose="02020603050405020304" pitchFamily="18" charset="0"/>
                         </a:rPr>
-                        <a:t>Синхронизация (мьютексы, ивенты)</a:t>
+                        <a:t>Синхронизация (мьютексы</a:t>
                       </a:r>
-                      <a:endParaRPr lang="ru-RU" sz="2400" dirty="0" smtClean="0">
-                        <a:solidFill>
-                          <a:schemeClr val="bg1"/>
-                        </a:solidFill>
-                        <a:latin typeface="Times New Roman" panose="02020603050405020304" pitchFamily="18" charset="0"/>
-                        <a:cs typeface="Times New Roman" panose="02020603050405020304" pitchFamily="18" charset="0"/>
-                      </a:endParaRPr>
+                      <a:r>
+                        <a:rPr lang="en-US" sz="2400" dirty="0">
+                          <a:solidFill>
+                            <a:schemeClr val="bg1"/>
+                          </a:solidFill>
+                          <a:latin typeface="Times New Roman" panose="02020603050405020304" pitchFamily="18" charset="0"/>
+                          <a:cs typeface="Times New Roman" panose="02020603050405020304" pitchFamily="18" charset="0"/>
+                        </a:rPr>
+                        <a:t>/</a:t>
+                      </a:r>
+                      <a:r>
+                        <a:rPr lang="ru-RU" sz="2400" dirty="0">
+                          <a:solidFill>
+                            <a:schemeClr val="bg1"/>
+                          </a:solidFill>
+                          <a:latin typeface="Times New Roman" panose="02020603050405020304" pitchFamily="18" charset="0"/>
+                          <a:cs typeface="Times New Roman" panose="02020603050405020304" pitchFamily="18" charset="0"/>
+                        </a:rPr>
+                        <a:t>ивенты)</a:t>
+                      </a:r>
                     </a:p>
                   </a:txBody>
                   <a:tcPr/>
@@ -4115,8 +4053,68 @@
         </p:blipFill>
         <p:spPr>
           <a:xfrm>
-            <a:off x="7115504" y="2617077"/>
-            <a:ext cx="3042746" cy="677916"/>
+            <a:off x="6376086" y="2617076"/>
+            <a:ext cx="3782164" cy="811923"/>
+          </a:xfrm>
+          <a:prstGeom prst="rect">
+            <a:avLst/>
+          </a:prstGeom>
+        </p:spPr>
+      </p:pic>
+      <p:pic>
+        <p:nvPicPr>
+          <p:cNvPr id="9" name="Рисунок 8">
+            <a:extLst>
+              <a:ext uri="{FF2B5EF4-FFF2-40B4-BE49-F238E27FC236}">
+                <a16:creationId xmlns:a16="http://schemas.microsoft.com/office/drawing/2014/main" id="{4C85278C-2EE8-0251-C9F4-CF531CC7F601}"/>
+              </a:ext>
+            </a:extLst>
+          </p:cNvPr>
+          <p:cNvPicPr>
+            <a:picLocks noChangeAspect="1"/>
+          </p:cNvPicPr>
+          <p:nvPr/>
+        </p:nvPicPr>
+        <p:blipFill>
+          <a:blip r:embed="rId4"/>
+          <a:stretch>
+            <a:fillRect/>
+          </a:stretch>
+        </p:blipFill>
+        <p:spPr>
+          <a:xfrm>
+            <a:off x="5038197" y="3607591"/>
+            <a:ext cx="6676007" cy="1219370"/>
+          </a:xfrm>
+          <a:prstGeom prst="rect">
+            <a:avLst/>
+          </a:prstGeom>
+        </p:spPr>
+      </p:pic>
+      <p:pic>
+        <p:nvPicPr>
+          <p:cNvPr id="13" name="Рисунок 12">
+            <a:extLst>
+              <a:ext uri="{FF2B5EF4-FFF2-40B4-BE49-F238E27FC236}">
+                <a16:creationId xmlns:a16="http://schemas.microsoft.com/office/drawing/2014/main" id="{637DA10F-59EB-449A-FB8D-DBAA70A68792}"/>
+              </a:ext>
+            </a:extLst>
+          </p:cNvPr>
+          <p:cNvPicPr>
+            <a:picLocks noChangeAspect="1"/>
+          </p:cNvPicPr>
+          <p:nvPr/>
+        </p:nvPicPr>
+        <p:blipFill>
+          <a:blip r:embed="rId5"/>
+          <a:stretch>
+            <a:fillRect/>
+          </a:stretch>
+        </p:blipFill>
+        <p:spPr>
+          <a:xfrm>
+            <a:off x="6095999" y="5019640"/>
+            <a:ext cx="5618205" cy="1084595"/>
           </a:xfrm>
           <a:prstGeom prst="rect">
             <a:avLst/>
@@ -4133,13 +4131,6 @@
   <p:clrMapOvr>
     <a:masterClrMapping/>
   </p:clrMapOvr>
-  <p:timing>
-    <p:tnLst>
-      <p:par>
-        <p:cTn id="1" dur="indefinite" restart="never" nodeType="tmRoot"/>
-      </p:par>
-    </p:tnLst>
-  </p:timing>
 </p:sld>
 </file>
 
@@ -4226,25 +4217,8 @@
                 <a:latin typeface="Times New Roman" panose="02020603050405020304" pitchFamily="18" charset="0"/>
                 <a:cs typeface="Times New Roman" panose="02020603050405020304" pitchFamily="18" charset="0"/>
               </a:rPr>
-              <a:t>Расстановка кораблей и работа с </a:t>
-            </a:r>
-            <a:r>
-              <a:rPr lang="ru-RU" sz="3600" dirty="0" smtClean="0">
-                <a:solidFill>
-                  <a:schemeClr val="bg1"/>
-                </a:solidFill>
-                <a:latin typeface="Times New Roman" panose="02020603050405020304" pitchFamily="18" charset="0"/>
-                <a:cs typeface="Times New Roman" panose="02020603050405020304" pitchFamily="18" charset="0"/>
-              </a:rPr>
-              <a:t>памятью</a:t>
-            </a:r>
-            <a:endParaRPr lang="ru-RU" sz="3600" dirty="0">
-              <a:solidFill>
-                <a:schemeClr val="bg1"/>
-              </a:solidFill>
-              <a:latin typeface="Times New Roman" panose="02020603050405020304" pitchFamily="18" charset="0"/>
-              <a:cs typeface="Times New Roman" panose="02020603050405020304" pitchFamily="18" charset="0"/>
-            </a:endParaRPr>
+              <a:t>Расстановка кораблей и работа с памятью</a:t>
+            </a:r>
           </a:p>
         </p:txBody>
       </p:sp>
@@ -4299,7 +4273,7 @@
               <a:buChar char="•"/>
             </a:pPr>
             <a:r>
-              <a:rPr lang="ru-RU" sz="2400" dirty="0" smtClean="0">
+              <a:rPr lang="ru-RU" sz="2400" dirty="0">
                 <a:solidFill>
                   <a:schemeClr val="bg1"/>
                 </a:solidFill>
@@ -4310,7 +4284,7 @@
             </a:r>
           </a:p>
           <a:p>
-            <a:endParaRPr lang="ru-RU" sz="2400" dirty="0" smtClean="0">
+            <a:endParaRPr lang="ru-RU" sz="2400" dirty="0">
               <a:solidFill>
                 <a:schemeClr val="bg1"/>
               </a:solidFill>
@@ -4324,7 +4298,7 @@
               <a:buChar char="•"/>
             </a:pPr>
             <a:r>
-              <a:rPr lang="ru-RU" sz="2400" dirty="0" smtClean="0">
+              <a:rPr lang="ru-RU" sz="2400" dirty="0">
                 <a:solidFill>
                   <a:schemeClr val="bg1"/>
                 </a:solidFill>
@@ -4335,7 +4309,7 @@
             </a:r>
           </a:p>
           <a:p>
-            <a:endParaRPr lang="ru-RU" sz="2400" dirty="0" smtClean="0">
+            <a:endParaRPr lang="ru-RU" sz="2400" dirty="0">
               <a:solidFill>
                 <a:schemeClr val="bg1"/>
               </a:solidFill>
@@ -4349,7 +4323,7 @@
               <a:buChar char="•"/>
             </a:pPr>
             <a:r>
-              <a:rPr lang="ru-RU" sz="2400" dirty="0" smtClean="0">
+              <a:rPr lang="ru-RU" sz="2400" dirty="0">
                 <a:solidFill>
                   <a:schemeClr val="bg1"/>
                 </a:solidFill>
@@ -4358,13 +4332,6 @@
               </a:rPr>
               <a:t>Реализовал деструктор для освобождения памяти</a:t>
             </a:r>
-            <a:endParaRPr lang="ru-RU" sz="2400" dirty="0">
-              <a:solidFill>
-                <a:schemeClr val="bg1"/>
-              </a:solidFill>
-              <a:latin typeface="Times New Roman" panose="02020603050405020304" pitchFamily="18" charset="0"/>
-              <a:cs typeface="Times New Roman" panose="02020603050405020304" pitchFamily="18" charset="0"/>
-            </a:endParaRPr>
           </a:p>
         </p:txBody>
       </p:sp>
@@ -4432,7 +4399,7 @@
                         <a:defRPr/>
                       </a:pPr>
                       <a:r>
-                        <a:rPr lang="ru-RU" sz="2400" dirty="0" smtClean="0">
+                        <a:rPr lang="ru-RU" sz="2400" dirty="0">
                           <a:solidFill>
                             <a:schemeClr val="bg1"/>
                           </a:solidFill>
@@ -4499,7 +4466,7 @@
                         <a:defRPr/>
                       </a:pPr>
                       <a:r>
-                        <a:rPr lang="ru-RU" sz="2400" dirty="0" smtClean="0">
+                        <a:rPr lang="ru-RU" sz="2400" dirty="0">
                           <a:solidFill>
                             <a:schemeClr val="bg1"/>
                           </a:solidFill>
@@ -4556,7 +4523,7 @@
                         <a:defRPr/>
                       </a:pPr>
                       <a:r>
-                        <a:rPr lang="ru-RU" sz="2400" dirty="0" smtClean="0">
+                        <a:rPr lang="ru-RU" sz="2400" dirty="0">
                           <a:solidFill>
                             <a:schemeClr val="bg1"/>
                           </a:solidFill>
@@ -4679,6 +4646,1089 @@
     <p:extLst>
       <p:ext uri="{BB962C8B-B14F-4D97-AF65-F5344CB8AC3E}">
         <p14:creationId xmlns:p14="http://schemas.microsoft.com/office/powerpoint/2010/main" val="4220623366"/>
+      </p:ext>
+    </p:extLst>
+  </p:cSld>
+  <p:clrMapOvr>
+    <a:masterClrMapping/>
+  </p:clrMapOvr>
+</p:sld>
+</file>
+
+<file path=ppt/slides/slide5.xml><?xml version="1.0" encoding="utf-8"?>
+<p:sld xmlns:a="http://schemas.openxmlformats.org/drawingml/2006/main" xmlns:r="http://schemas.openxmlformats.org/officeDocument/2006/relationships" xmlns:p="http://schemas.openxmlformats.org/presentationml/2006/main">
+  <p:cSld>
+    <p:bg>
+      <p:bgPr>
+        <a:blipFill dpi="0" rotWithShape="1">
+          <a:blip r:embed="rId2">
+            <a:lum/>
+          </a:blip>
+          <a:srcRect/>
+          <a:stretch>
+            <a:fillRect t="-1000" b="-1000"/>
+          </a:stretch>
+        </a:blipFill>
+        <a:effectLst/>
+      </p:bgPr>
+    </p:bg>
+    <p:spTree>
+      <p:nvGrpSpPr>
+        <p:cNvPr id="1" name=""/>
+        <p:cNvGrpSpPr/>
+        <p:nvPr/>
+      </p:nvGrpSpPr>
+      <p:grpSpPr>
+        <a:xfrm>
+          <a:off x="0" y="0"/>
+          <a:ext cx="0" cy="0"/>
+          <a:chOff x="0" y="0"/>
+          <a:chExt cx="0" cy="0"/>
+        </a:xfrm>
+      </p:grpSpPr>
+      <p:sp>
+        <p:nvSpPr>
+          <p:cNvPr id="2" name="Заголовок 1"/>
+          <p:cNvSpPr>
+            <a:spLocks noGrp="1"/>
+          </p:cNvSpPr>
+          <p:nvPr>
+            <p:ph type="title"/>
+          </p:nvPr>
+        </p:nvSpPr>
+        <p:spPr>
+          <a:xfrm>
+            <a:off x="662152" y="220719"/>
+            <a:ext cx="4852112" cy="916103"/>
+          </a:xfrm>
+          <a:solidFill>
+            <a:schemeClr val="accent6">
+              <a:alpha val="50000"/>
+            </a:schemeClr>
+          </a:solidFill>
+          <a:ln>
+            <a:noFill/>
+          </a:ln>
+        </p:spPr>
+        <p:style>
+          <a:lnRef idx="0">
+            <a:scrgbClr r="0" g="0" b="0"/>
+          </a:lnRef>
+          <a:fillRef idx="0">
+            <a:scrgbClr r="0" g="0" b="0"/>
+          </a:fillRef>
+          <a:effectRef idx="0">
+            <a:scrgbClr r="0" g="0" b="0"/>
+          </a:effectRef>
+          <a:fontRef idx="minor">
+            <a:schemeClr val="lt1"/>
+          </a:fontRef>
+        </p:style>
+        <p:txBody>
+          <a:bodyPr>
+            <a:noAutofit/>
+          </a:bodyPr>
+          <a:lstStyle/>
+          <a:p>
+            <a:pPr algn="just"/>
+            <a:r>
+              <a:rPr lang="ru-RU" sz="5400" dirty="0">
+                <a:solidFill>
+                  <a:schemeClr val="bg1"/>
+                </a:solidFill>
+                <a:latin typeface="Times New Roman" panose="02020603050405020304" pitchFamily="18" charset="0"/>
+                <a:cs typeface="Times New Roman" panose="02020603050405020304" pitchFamily="18" charset="0"/>
+              </a:rPr>
+              <a:t>Реализация боя</a:t>
+            </a:r>
+          </a:p>
+        </p:txBody>
+      </p:sp>
+      <p:graphicFrame>
+        <p:nvGraphicFramePr>
+          <p:cNvPr id="6" name="Таблица 5"/>
+          <p:cNvGraphicFramePr>
+            <a:graphicFrameLocks noGrp="1"/>
+          </p:cNvGraphicFramePr>
+          <p:nvPr>
+            <p:extLst>
+              <p:ext uri="{D42A27DB-BD31-4B8C-83A1-F6EECF244321}">
+                <p14:modId xmlns:p14="http://schemas.microsoft.com/office/powerpoint/2010/main" val="4294721690"/>
+              </p:ext>
+            </p:extLst>
+          </p:nvPr>
+        </p:nvGraphicFramePr>
+        <p:xfrm>
+          <a:off x="333703" y="1404880"/>
+          <a:ext cx="11524594" cy="5674700"/>
+        </p:xfrm>
+        <a:graphic>
+          <a:graphicData uri="http://schemas.openxmlformats.org/drawingml/2006/table">
+            <a:tbl>
+              <a:tblPr firstRow="1" bandRow="1">
+                <a:tableStyleId>{2D5ABB26-0587-4C30-8999-92F81FD0307C}</a:tableStyleId>
+              </a:tblPr>
+              <a:tblGrid>
+                <a:gridCol w="5762297">
+                  <a:extLst>
+                    <a:ext uri="{9D8B030D-6E8A-4147-A177-3AD203B41FA5}">
+                      <a16:colId xmlns:a16="http://schemas.microsoft.com/office/drawing/2014/main" val="2081857502"/>
+                    </a:ext>
+                  </a:extLst>
+                </a:gridCol>
+                <a:gridCol w="5762297">
+                  <a:extLst>
+                    <a:ext uri="{9D8B030D-6E8A-4147-A177-3AD203B41FA5}">
+                      <a16:colId xmlns:a16="http://schemas.microsoft.com/office/drawing/2014/main" val="4163045744"/>
+                    </a:ext>
+                  </a:extLst>
+                </a:gridCol>
+              </a:tblGrid>
+              <a:tr h="1660053">
+                <a:tc>
+                  <a:txBody>
+                    <a:bodyPr/>
+                    <a:lstStyle/>
+                    <a:p>
+                      <a:pPr marL="342900" marR="0" indent="-342900" algn="l" defTabSz="914400" rtl="0" eaLnBrk="1" fontAlgn="auto" latinLnBrk="0" hangingPunct="1">
+                        <a:lnSpc>
+                          <a:spcPct val="100000"/>
+                        </a:lnSpc>
+                        <a:spcBef>
+                          <a:spcPts val="0"/>
+                        </a:spcBef>
+                        <a:spcAft>
+                          <a:spcPts val="0"/>
+                        </a:spcAft>
+                        <a:buClrTx/>
+                        <a:buSzTx/>
+                        <a:buFont typeface="Arial" panose="020B0604020202020204" pitchFamily="34" charset="0"/>
+                        <a:buChar char="•"/>
+                        <a:tabLst/>
+                        <a:defRPr/>
+                      </a:pPr>
+                      <a:r>
+                        <a:rPr lang="ru-RU" sz="2400" b="1" dirty="0">
+                          <a:solidFill>
+                            <a:schemeClr val="bg1"/>
+                          </a:solidFill>
+                          <a:latin typeface="Times New Roman" panose="02020603050405020304" pitchFamily="18" charset="0"/>
+                          <a:cs typeface="Times New Roman" panose="02020603050405020304" pitchFamily="18" charset="0"/>
+                        </a:rPr>
+                        <a:t>обработка выстрела</a:t>
+                      </a:r>
+                      <a:endParaRPr lang="ru-RU" sz="2400" b="1" dirty="0">
+                        <a:latin typeface="Times New Roman" panose="02020603050405020304" pitchFamily="18" charset="0"/>
+                        <a:cs typeface="Times New Roman" panose="02020603050405020304" pitchFamily="18" charset="0"/>
+                      </a:endParaRPr>
+                    </a:p>
+                  </a:txBody>
+                  <a:tcPr/>
+                </a:tc>
+                <a:tc>
+                  <a:txBody>
+                    <a:bodyPr/>
+                    <a:lstStyle/>
+                    <a:p>
+                      <a:pPr algn="l"/>
+                      <a:endParaRPr lang="ru-RU" sz="2400" dirty="0">
+                        <a:latin typeface="Times New Roman" panose="02020603050405020304" pitchFamily="18" charset="0"/>
+                        <a:cs typeface="Times New Roman" panose="02020603050405020304" pitchFamily="18" charset="0"/>
+                      </a:endParaRPr>
+                    </a:p>
+                  </a:txBody>
+                  <a:tcPr/>
+                </a:tc>
+                <a:extLst>
+                  <a:ext uri="{0D108BD9-81ED-4DB2-BD59-A6C34878D82A}">
+                    <a16:rowId xmlns:a16="http://schemas.microsoft.com/office/drawing/2014/main" val="2441657293"/>
+                  </a:ext>
+                </a:extLst>
+              </a:tr>
+              <a:tr h="1642534">
+                <a:tc>
+                  <a:txBody>
+                    <a:bodyPr/>
+                    <a:lstStyle/>
+                    <a:p>
+                      <a:pPr marL="342900" marR="0" indent="-342900" algn="l" defTabSz="914400" rtl="0" eaLnBrk="1" fontAlgn="auto" latinLnBrk="0" hangingPunct="1">
+                        <a:lnSpc>
+                          <a:spcPct val="100000"/>
+                        </a:lnSpc>
+                        <a:spcBef>
+                          <a:spcPts val="0"/>
+                        </a:spcBef>
+                        <a:spcAft>
+                          <a:spcPts val="0"/>
+                        </a:spcAft>
+                        <a:buClrTx/>
+                        <a:buSzTx/>
+                        <a:buFont typeface="Arial" panose="020B0604020202020204" pitchFamily="34" charset="0"/>
+                        <a:buChar char="•"/>
+                        <a:tabLst/>
+                        <a:defRPr/>
+                      </a:pPr>
+                      <a:r>
+                        <a:rPr lang="ru-RU" sz="2400" b="1" dirty="0">
+                          <a:solidFill>
+                            <a:schemeClr val="bg1"/>
+                          </a:solidFill>
+                          <a:latin typeface="Times New Roman" panose="02020603050405020304" pitchFamily="18" charset="0"/>
+                          <a:cs typeface="Times New Roman" panose="02020603050405020304" pitchFamily="18" charset="0"/>
+                        </a:rPr>
+                        <a:t>добивание бота</a:t>
+                      </a:r>
+                    </a:p>
+                  </a:txBody>
+                  <a:tcPr/>
+                </a:tc>
+                <a:tc>
+                  <a:txBody>
+                    <a:bodyPr/>
+                    <a:lstStyle/>
+                    <a:p>
+                      <a:pPr algn="l"/>
+                      <a:endParaRPr lang="ru-RU" sz="2400" dirty="0">
+                        <a:latin typeface="Times New Roman" panose="02020603050405020304" pitchFamily="18" charset="0"/>
+                        <a:cs typeface="Times New Roman" panose="02020603050405020304" pitchFamily="18" charset="0"/>
+                      </a:endParaRPr>
+                    </a:p>
+                  </a:txBody>
+                  <a:tcPr/>
+                </a:tc>
+                <a:extLst>
+                  <a:ext uri="{0D108BD9-81ED-4DB2-BD59-A6C34878D82A}">
+                    <a16:rowId xmlns:a16="http://schemas.microsoft.com/office/drawing/2014/main" val="489831900"/>
+                  </a:ext>
+                </a:extLst>
+              </a:tr>
+              <a:tr h="2372113">
+                <a:tc>
+                  <a:txBody>
+                    <a:bodyPr/>
+                    <a:lstStyle/>
+                    <a:p>
+                      <a:pPr marL="342900" marR="0" indent="-342900" algn="l" defTabSz="914400" rtl="0" eaLnBrk="1" fontAlgn="auto" latinLnBrk="0" hangingPunct="1">
+                        <a:lnSpc>
+                          <a:spcPct val="100000"/>
+                        </a:lnSpc>
+                        <a:spcBef>
+                          <a:spcPts val="0"/>
+                        </a:spcBef>
+                        <a:spcAft>
+                          <a:spcPts val="0"/>
+                        </a:spcAft>
+                        <a:buClrTx/>
+                        <a:buSzTx/>
+                        <a:buFont typeface="Arial" panose="020B0604020202020204" pitchFamily="34" charset="0"/>
+                        <a:buChar char="•"/>
+                        <a:tabLst/>
+                        <a:defRPr/>
+                      </a:pPr>
+                      <a:r>
+                        <a:rPr lang="ru-RU" sz="2400" b="1" dirty="0">
+                          <a:solidFill>
+                            <a:schemeClr val="bg1"/>
+                          </a:solidFill>
+                          <a:latin typeface="Times New Roman" panose="02020603050405020304" pitchFamily="18" charset="0"/>
+                          <a:cs typeface="Times New Roman" panose="02020603050405020304" pitchFamily="18" charset="0"/>
+                        </a:rPr>
+                        <a:t>потопление корабля</a:t>
+                      </a:r>
+                      <a:endParaRPr lang="ru-RU" sz="2400" b="1" dirty="0">
+                        <a:latin typeface="Times New Roman" panose="02020603050405020304" pitchFamily="18" charset="0"/>
+                        <a:cs typeface="Times New Roman" panose="02020603050405020304" pitchFamily="18" charset="0"/>
+                      </a:endParaRPr>
+                    </a:p>
+                  </a:txBody>
+                  <a:tcPr/>
+                </a:tc>
+                <a:tc>
+                  <a:txBody>
+                    <a:bodyPr/>
+                    <a:lstStyle/>
+                    <a:p>
+                      <a:pPr algn="l"/>
+                      <a:endParaRPr lang="ru-RU" sz="2400" dirty="0">
+                        <a:latin typeface="Times New Roman" panose="02020603050405020304" pitchFamily="18" charset="0"/>
+                        <a:cs typeface="Times New Roman" panose="02020603050405020304" pitchFamily="18" charset="0"/>
+                      </a:endParaRPr>
+                    </a:p>
+                  </a:txBody>
+                  <a:tcPr/>
+                </a:tc>
+                <a:extLst>
+                  <a:ext uri="{0D108BD9-81ED-4DB2-BD59-A6C34878D82A}">
+                    <a16:rowId xmlns:a16="http://schemas.microsoft.com/office/drawing/2014/main" val="3874804075"/>
+                  </a:ext>
+                </a:extLst>
+              </a:tr>
+            </a:tbl>
+          </a:graphicData>
+        </a:graphic>
+      </p:graphicFrame>
+      <p:pic>
+        <p:nvPicPr>
+          <p:cNvPr id="5" name="Рисунок 4">
+            <a:extLst>
+              <a:ext uri="{FF2B5EF4-FFF2-40B4-BE49-F238E27FC236}">
+                <a16:creationId xmlns:a16="http://schemas.microsoft.com/office/drawing/2014/main" id="{C8423B9A-794D-422A-9D37-46030DC6284E}"/>
+              </a:ext>
+            </a:extLst>
+          </p:cNvPr>
+          <p:cNvPicPr>
+            <a:picLocks noChangeAspect="1"/>
+          </p:cNvPicPr>
+          <p:nvPr/>
+        </p:nvPicPr>
+        <p:blipFill>
+          <a:blip r:embed="rId3"/>
+          <a:stretch>
+            <a:fillRect/>
+          </a:stretch>
+        </p:blipFill>
+        <p:spPr>
+          <a:xfrm>
+            <a:off x="6296571" y="188189"/>
+            <a:ext cx="5012268" cy="2056102"/>
+          </a:xfrm>
+          <a:prstGeom prst="rect">
+            <a:avLst/>
+          </a:prstGeom>
+          <a:solidFill>
+            <a:srgbClr val="FFFFFF">
+              <a:shade val="85000"/>
+            </a:srgbClr>
+          </a:solidFill>
+          <a:ln w="88900" cap="sq">
+            <a:solidFill>
+              <a:srgbClr val="FFFFFF"/>
+            </a:solidFill>
+            <a:miter lim="800000"/>
+          </a:ln>
+          <a:effectLst>
+            <a:outerShdw blurRad="55000" dist="18000" dir="5400000" algn="tl" rotWithShape="0">
+              <a:srgbClr val="000000">
+                <a:alpha val="40000"/>
+              </a:srgbClr>
+            </a:outerShdw>
+          </a:effectLst>
+          <a:scene3d>
+            <a:camera prst="orthographicFront"/>
+            <a:lightRig rig="twoPt" dir="t">
+              <a:rot lat="0" lon="0" rev="7200000"/>
+            </a:lightRig>
+          </a:scene3d>
+          <a:sp3d>
+            <a:bevelT w="25400" h="19050"/>
+            <a:contourClr>
+              <a:srgbClr val="FFFFFF"/>
+            </a:contourClr>
+          </a:sp3d>
+        </p:spPr>
+        <p:style>
+          <a:lnRef idx="0">
+            <a:scrgbClr r="0" g="0" b="0"/>
+          </a:lnRef>
+          <a:fillRef idx="0">
+            <a:scrgbClr r="0" g="0" b="0"/>
+          </a:fillRef>
+          <a:effectRef idx="0">
+            <a:scrgbClr r="0" g="0" b="0"/>
+          </a:effectRef>
+          <a:fontRef idx="minor">
+            <a:schemeClr val="dk1"/>
+          </a:fontRef>
+        </p:style>
+      </p:pic>
+      <p:pic>
+        <p:nvPicPr>
+          <p:cNvPr id="15" name="Рисунок 14">
+            <a:extLst>
+              <a:ext uri="{FF2B5EF4-FFF2-40B4-BE49-F238E27FC236}">
+                <a16:creationId xmlns:a16="http://schemas.microsoft.com/office/drawing/2014/main" id="{28AE1847-09BB-4A24-BB27-45CB49BE1092}"/>
+              </a:ext>
+            </a:extLst>
+          </p:cNvPr>
+          <p:cNvPicPr>
+            <a:picLocks noChangeAspect="1"/>
+          </p:cNvPicPr>
+          <p:nvPr/>
+        </p:nvPicPr>
+        <p:blipFill>
+          <a:blip r:embed="rId4"/>
+          <a:stretch>
+            <a:fillRect/>
+          </a:stretch>
+        </p:blipFill>
+        <p:spPr>
+          <a:xfrm>
+            <a:off x="3842492" y="4936604"/>
+            <a:ext cx="6487053" cy="1700677"/>
+          </a:xfrm>
+          <a:prstGeom prst="rect">
+            <a:avLst/>
+          </a:prstGeom>
+          <a:solidFill>
+            <a:srgbClr val="FFFFFF">
+              <a:shade val="85000"/>
+            </a:srgbClr>
+          </a:solidFill>
+          <a:ln w="88900" cap="sq">
+            <a:solidFill>
+              <a:srgbClr val="FFFFFF"/>
+            </a:solidFill>
+            <a:miter lim="800000"/>
+          </a:ln>
+          <a:effectLst>
+            <a:outerShdw blurRad="55000" dist="18000" dir="5400000" algn="tl" rotWithShape="0">
+              <a:srgbClr val="000000">
+                <a:alpha val="40000"/>
+              </a:srgbClr>
+            </a:outerShdw>
+          </a:effectLst>
+          <a:scene3d>
+            <a:camera prst="orthographicFront"/>
+            <a:lightRig rig="twoPt" dir="t">
+              <a:rot lat="0" lon="0" rev="7200000"/>
+            </a:lightRig>
+          </a:scene3d>
+          <a:sp3d>
+            <a:bevelT w="25400" h="19050"/>
+            <a:contourClr>
+              <a:srgbClr val="FFFFFF"/>
+            </a:contourClr>
+          </a:sp3d>
+        </p:spPr>
+      </p:pic>
+      <p:pic>
+        <p:nvPicPr>
+          <p:cNvPr id="21" name="Рисунок 20">
+            <a:extLst>
+              <a:ext uri="{FF2B5EF4-FFF2-40B4-BE49-F238E27FC236}">
+                <a16:creationId xmlns:a16="http://schemas.microsoft.com/office/drawing/2014/main" id="{22634783-3CBB-4EA8-9A57-235A80C86EBE}"/>
+              </a:ext>
+            </a:extLst>
+          </p:cNvPr>
+          <p:cNvPicPr>
+            <a:picLocks noChangeAspect="1"/>
+          </p:cNvPicPr>
+          <p:nvPr/>
+        </p:nvPicPr>
+        <p:blipFill>
+          <a:blip r:embed="rId5"/>
+          <a:stretch>
+            <a:fillRect/>
+          </a:stretch>
+        </p:blipFill>
+        <p:spPr>
+          <a:xfrm>
+            <a:off x="4866958" y="2368746"/>
+            <a:ext cx="5909248" cy="2443402"/>
+          </a:xfrm>
+          <a:prstGeom prst="rect">
+            <a:avLst/>
+          </a:prstGeom>
+          <a:solidFill>
+            <a:srgbClr val="FFFFFF">
+              <a:shade val="85000"/>
+            </a:srgbClr>
+          </a:solidFill>
+          <a:ln w="88900" cap="sq">
+            <a:solidFill>
+              <a:srgbClr val="FFFFFF"/>
+            </a:solidFill>
+            <a:miter lim="800000"/>
+          </a:ln>
+          <a:effectLst>
+            <a:outerShdw blurRad="55000" dist="18000" dir="5400000" algn="tl" rotWithShape="0">
+              <a:srgbClr val="000000">
+                <a:alpha val="40000"/>
+              </a:srgbClr>
+            </a:outerShdw>
+          </a:effectLst>
+          <a:scene3d>
+            <a:camera prst="orthographicFront"/>
+            <a:lightRig rig="twoPt" dir="t">
+              <a:rot lat="0" lon="0" rev="7200000"/>
+            </a:lightRig>
+          </a:scene3d>
+          <a:sp3d>
+            <a:bevelT w="25400" h="19050"/>
+            <a:contourClr>
+              <a:srgbClr val="FFFFFF"/>
+            </a:contourClr>
+          </a:sp3d>
+        </p:spPr>
+      </p:pic>
+    </p:spTree>
+    <p:extLst>
+      <p:ext uri="{BB962C8B-B14F-4D97-AF65-F5344CB8AC3E}">
+        <p14:creationId xmlns:p14="http://schemas.microsoft.com/office/powerpoint/2010/main" val="444461931"/>
+      </p:ext>
+    </p:extLst>
+  </p:cSld>
+  <p:clrMapOvr>
+    <a:masterClrMapping/>
+  </p:clrMapOvr>
+</p:sld>
+</file>
+
+<file path=ppt/slides/slide6.xml><?xml version="1.0" encoding="utf-8"?>
+<p:sld xmlns:a="http://schemas.openxmlformats.org/drawingml/2006/main" xmlns:r="http://schemas.openxmlformats.org/officeDocument/2006/relationships" xmlns:p="http://schemas.openxmlformats.org/presentationml/2006/main">
+  <p:cSld>
+    <p:bg>
+      <p:bgPr>
+        <a:blipFill dpi="0" rotWithShape="1">
+          <a:blip r:embed="rId2">
+            <a:lum/>
+          </a:blip>
+          <a:srcRect/>
+          <a:stretch>
+            <a:fillRect t="-1000" b="-1000"/>
+          </a:stretch>
+        </a:blipFill>
+        <a:effectLst/>
+      </p:bgPr>
+    </p:bg>
+    <p:spTree>
+      <p:nvGrpSpPr>
+        <p:cNvPr id="1" name="">
+          <a:extLst>
+            <a:ext uri="{FF2B5EF4-FFF2-40B4-BE49-F238E27FC236}">
+              <a16:creationId xmlns:a16="http://schemas.microsoft.com/office/drawing/2014/main" id="{C192D5DA-69AE-EE80-BBB1-9FE2DE49145C}"/>
+            </a:ext>
+          </a:extLst>
+        </p:cNvPr>
+        <p:cNvGrpSpPr/>
+        <p:nvPr/>
+      </p:nvGrpSpPr>
+      <p:grpSpPr>
+        <a:xfrm>
+          <a:off x="0" y="0"/>
+          <a:ext cx="0" cy="0"/>
+          <a:chOff x="0" y="0"/>
+          <a:chExt cx="0" cy="0"/>
+        </a:xfrm>
+      </p:grpSpPr>
+      <p:sp>
+        <p:nvSpPr>
+          <p:cNvPr id="2" name="Заголовок 1">
+            <a:extLst>
+              <a:ext uri="{FF2B5EF4-FFF2-40B4-BE49-F238E27FC236}">
+                <a16:creationId xmlns:a16="http://schemas.microsoft.com/office/drawing/2014/main" id="{96CB5135-5DDD-5B98-032D-8B5089458B99}"/>
+              </a:ext>
+            </a:extLst>
+          </p:cNvPr>
+          <p:cNvSpPr>
+            <a:spLocks noGrp="1"/>
+          </p:cNvSpPr>
+          <p:nvPr>
+            <p:ph type="title"/>
+          </p:nvPr>
+        </p:nvSpPr>
+        <p:spPr>
+          <a:xfrm>
+            <a:off x="55606" y="43249"/>
+            <a:ext cx="4637256" cy="1581665"/>
+          </a:xfrm>
+          <a:solidFill>
+            <a:schemeClr val="accent6">
+              <a:alpha val="50000"/>
+            </a:schemeClr>
+          </a:solidFill>
+          <a:ln>
+            <a:noFill/>
+          </a:ln>
+        </p:spPr>
+        <p:style>
+          <a:lnRef idx="0">
+            <a:scrgbClr r="0" g="0" b="0"/>
+          </a:lnRef>
+          <a:fillRef idx="0">
+            <a:scrgbClr r="0" g="0" b="0"/>
+          </a:fillRef>
+          <a:effectRef idx="0">
+            <a:scrgbClr r="0" g="0" b="0"/>
+          </a:effectRef>
+          <a:fontRef idx="minor">
+            <a:schemeClr val="lt1"/>
+          </a:fontRef>
+        </p:style>
+        <p:txBody>
+          <a:bodyPr>
+            <a:noAutofit/>
+          </a:bodyPr>
+          <a:lstStyle/>
+          <a:p>
+            <a:r>
+              <a:rPr lang="ru-RU" sz="3600" b="1" dirty="0">
+                <a:solidFill>
+                  <a:schemeClr val="accent4">
+                    <a:lumMod val="60000"/>
+                    <a:lumOff val="40000"/>
+                  </a:schemeClr>
+                </a:solidFill>
+              </a:rPr>
+              <a:t>Реализация многопоточности и синхронизация ходов</a:t>
+            </a:r>
+            <a:endParaRPr lang="ru-RU" sz="4000" dirty="0">
+              <a:solidFill>
+                <a:schemeClr val="accent4">
+                  <a:lumMod val="60000"/>
+                  <a:lumOff val="40000"/>
+                </a:schemeClr>
+              </a:solidFill>
+              <a:latin typeface="Times New Roman" panose="02020603050405020304" pitchFamily="18" charset="0"/>
+              <a:cs typeface="Times New Roman" panose="02020603050405020304" pitchFamily="18" charset="0"/>
+            </a:endParaRPr>
+          </a:p>
+        </p:txBody>
+      </p:sp>
+      <p:graphicFrame>
+        <p:nvGraphicFramePr>
+          <p:cNvPr id="6" name="Таблица 5">
+            <a:extLst>
+              <a:ext uri="{FF2B5EF4-FFF2-40B4-BE49-F238E27FC236}">
+                <a16:creationId xmlns:a16="http://schemas.microsoft.com/office/drawing/2014/main" id="{4E040080-4BC4-BEE6-254F-CB5B3D6CFD9A}"/>
+              </a:ext>
+            </a:extLst>
+          </p:cNvPr>
+          <p:cNvGraphicFramePr>
+            <a:graphicFrameLocks noGrp="1"/>
+          </p:cNvGraphicFramePr>
+          <p:nvPr>
+            <p:extLst>
+              <p:ext uri="{D42A27DB-BD31-4B8C-83A1-F6EECF244321}">
+                <p14:modId xmlns:p14="http://schemas.microsoft.com/office/powerpoint/2010/main" val="2752925848"/>
+              </p:ext>
+            </p:extLst>
+          </p:nvPr>
+        </p:nvGraphicFramePr>
+        <p:xfrm>
+          <a:off x="333703" y="2302096"/>
+          <a:ext cx="11524594" cy="4855782"/>
+        </p:xfrm>
+        <a:graphic>
+          <a:graphicData uri="http://schemas.openxmlformats.org/drawingml/2006/table">
+            <a:tbl>
+              <a:tblPr firstRow="1" bandRow="1">
+                <a:tableStyleId>{2D5ABB26-0587-4C30-8999-92F81FD0307C}</a:tableStyleId>
+              </a:tblPr>
+              <a:tblGrid>
+                <a:gridCol w="5762297">
+                  <a:extLst>
+                    <a:ext uri="{9D8B030D-6E8A-4147-A177-3AD203B41FA5}">
+                      <a16:colId xmlns:a16="http://schemas.microsoft.com/office/drawing/2014/main" val="2081857502"/>
+                    </a:ext>
+                  </a:extLst>
+                </a:gridCol>
+                <a:gridCol w="5762297">
+                  <a:extLst>
+                    <a:ext uri="{9D8B030D-6E8A-4147-A177-3AD203B41FA5}">
+                      <a16:colId xmlns:a16="http://schemas.microsoft.com/office/drawing/2014/main" val="4163045744"/>
+                    </a:ext>
+                  </a:extLst>
+                </a:gridCol>
+              </a:tblGrid>
+              <a:tr h="1194857">
+                <a:tc>
+                  <a:txBody>
+                    <a:bodyPr/>
+                    <a:lstStyle/>
+                    <a:p>
+                      <a:pPr marL="342900" marR="0" indent="-342900" algn="l" defTabSz="914400" rtl="0" eaLnBrk="1" fontAlgn="auto" latinLnBrk="0" hangingPunct="1">
+                        <a:lnSpc>
+                          <a:spcPct val="100000"/>
+                        </a:lnSpc>
+                        <a:spcBef>
+                          <a:spcPts val="0"/>
+                        </a:spcBef>
+                        <a:spcAft>
+                          <a:spcPts val="0"/>
+                        </a:spcAft>
+                        <a:buClrTx/>
+                        <a:buSzTx/>
+                        <a:buFont typeface="Arial" panose="020B0604020202020204" pitchFamily="34" charset="0"/>
+                        <a:buChar char="•"/>
+                        <a:tabLst/>
+                        <a:defRPr/>
+                      </a:pPr>
+                      <a:r>
+                        <a:rPr lang="ru-RU" sz="2400" b="1" i="0" kern="1200" dirty="0">
+                          <a:solidFill>
+                            <a:schemeClr val="bg1"/>
+                          </a:solidFill>
+                          <a:effectLst/>
+                          <a:latin typeface="+mn-lt"/>
+                          <a:ea typeface="+mn-ea"/>
+                          <a:cs typeface="+mn-cs"/>
+                        </a:rPr>
+                        <a:t>Разделение логики на независимые потоки</a:t>
+                      </a:r>
+                      <a:endParaRPr lang="ru-RU" sz="3200" b="1" dirty="0">
+                        <a:solidFill>
+                          <a:schemeClr val="bg1"/>
+                        </a:solidFill>
+                        <a:latin typeface="Times New Roman" panose="02020603050405020304" pitchFamily="18" charset="0"/>
+                        <a:cs typeface="Times New Roman" panose="02020603050405020304" pitchFamily="18" charset="0"/>
+                      </a:endParaRPr>
+                    </a:p>
+                  </a:txBody>
+                  <a:tcPr/>
+                </a:tc>
+                <a:tc>
+                  <a:txBody>
+                    <a:bodyPr/>
+                    <a:lstStyle/>
+                    <a:p>
+                      <a:pPr algn="l"/>
+                      <a:endParaRPr lang="ru-RU" sz="2400" dirty="0">
+                        <a:latin typeface="Times New Roman" panose="02020603050405020304" pitchFamily="18" charset="0"/>
+                        <a:cs typeface="Times New Roman" panose="02020603050405020304" pitchFamily="18" charset="0"/>
+                      </a:endParaRPr>
+                    </a:p>
+                  </a:txBody>
+                  <a:tcPr/>
+                </a:tc>
+                <a:extLst>
+                  <a:ext uri="{0D108BD9-81ED-4DB2-BD59-A6C34878D82A}">
+                    <a16:rowId xmlns:a16="http://schemas.microsoft.com/office/drawing/2014/main" val="2441657293"/>
+                  </a:ext>
+                </a:extLst>
+              </a:tr>
+              <a:tr h="1288812">
+                <a:tc>
+                  <a:txBody>
+                    <a:bodyPr/>
+                    <a:lstStyle/>
+                    <a:p>
+                      <a:pPr marL="342900" marR="0" indent="-342900" algn="l" defTabSz="914400" rtl="0" eaLnBrk="1" fontAlgn="auto" latinLnBrk="0" hangingPunct="1">
+                        <a:lnSpc>
+                          <a:spcPct val="100000"/>
+                        </a:lnSpc>
+                        <a:spcBef>
+                          <a:spcPts val="0"/>
+                        </a:spcBef>
+                        <a:spcAft>
+                          <a:spcPts val="0"/>
+                        </a:spcAft>
+                        <a:buClrTx/>
+                        <a:buSzTx/>
+                        <a:buFont typeface="Arial" panose="020B0604020202020204" pitchFamily="34" charset="0"/>
+                        <a:buChar char="•"/>
+                        <a:tabLst/>
+                        <a:defRPr/>
+                      </a:pPr>
+                      <a:r>
+                        <a:rPr lang="ru-RU" sz="2400" b="1" i="0" kern="1200" dirty="0">
+                          <a:solidFill>
+                            <a:schemeClr val="bg1"/>
+                          </a:solidFill>
+                          <a:effectLst/>
+                          <a:latin typeface="+mn-lt"/>
+                          <a:ea typeface="+mn-ea"/>
+                          <a:cs typeface="+mn-cs"/>
+                        </a:rPr>
+                        <a:t>Блокировка потока</a:t>
+                      </a:r>
+                      <a:endParaRPr lang="ru-RU" sz="3200" b="1" dirty="0">
+                        <a:solidFill>
+                          <a:schemeClr val="bg1"/>
+                        </a:solidFill>
+                        <a:latin typeface="Times New Roman" panose="02020603050405020304" pitchFamily="18" charset="0"/>
+                        <a:cs typeface="Times New Roman" panose="02020603050405020304" pitchFamily="18" charset="0"/>
+                      </a:endParaRPr>
+                    </a:p>
+                  </a:txBody>
+                  <a:tcPr/>
+                </a:tc>
+                <a:tc>
+                  <a:txBody>
+                    <a:bodyPr/>
+                    <a:lstStyle/>
+                    <a:p>
+                      <a:pPr algn="l"/>
+                      <a:endParaRPr lang="ru-RU" sz="2400" dirty="0">
+                        <a:latin typeface="Times New Roman" panose="02020603050405020304" pitchFamily="18" charset="0"/>
+                        <a:cs typeface="Times New Roman" panose="02020603050405020304" pitchFamily="18" charset="0"/>
+                      </a:endParaRPr>
+                    </a:p>
+                  </a:txBody>
+                  <a:tcPr/>
+                </a:tc>
+                <a:extLst>
+                  <a:ext uri="{0D108BD9-81ED-4DB2-BD59-A6C34878D82A}">
+                    <a16:rowId xmlns:a16="http://schemas.microsoft.com/office/drawing/2014/main" val="489831900"/>
+                  </a:ext>
+                </a:extLst>
+              </a:tr>
+              <a:tr h="2372113">
+                <a:tc>
+                  <a:txBody>
+                    <a:bodyPr/>
+                    <a:lstStyle/>
+                    <a:p>
+                      <a:pPr marL="342900" marR="0" indent="-342900" algn="l" defTabSz="914400" rtl="0" eaLnBrk="1" fontAlgn="auto" latinLnBrk="0" hangingPunct="1">
+                        <a:lnSpc>
+                          <a:spcPct val="100000"/>
+                        </a:lnSpc>
+                        <a:spcBef>
+                          <a:spcPts val="0"/>
+                        </a:spcBef>
+                        <a:spcAft>
+                          <a:spcPts val="0"/>
+                        </a:spcAft>
+                        <a:buClrTx/>
+                        <a:buSzTx/>
+                        <a:buFont typeface="Arial" panose="020B0604020202020204" pitchFamily="34" charset="0"/>
+                        <a:buChar char="•"/>
+                        <a:tabLst/>
+                        <a:defRPr/>
+                      </a:pPr>
+                      <a:r>
+                        <a:rPr lang="ru-RU" sz="2400" b="1" i="0" kern="1200" dirty="0">
+                          <a:solidFill>
+                            <a:schemeClr val="bg1"/>
+                          </a:solidFill>
+                          <a:effectLst/>
+                          <a:latin typeface="+mn-lt"/>
+                          <a:ea typeface="+mn-ea"/>
+                          <a:cs typeface="+mn-cs"/>
+                        </a:rPr>
+                        <a:t>Передача управления</a:t>
+                      </a:r>
+                      <a:endParaRPr lang="ru-RU" sz="3200" b="1" dirty="0">
+                        <a:solidFill>
+                          <a:schemeClr val="bg1"/>
+                        </a:solidFill>
+                        <a:latin typeface="Times New Roman" panose="02020603050405020304" pitchFamily="18" charset="0"/>
+                        <a:cs typeface="Times New Roman" panose="02020603050405020304" pitchFamily="18" charset="0"/>
+                      </a:endParaRPr>
+                    </a:p>
+                  </a:txBody>
+                  <a:tcPr/>
+                </a:tc>
+                <a:tc>
+                  <a:txBody>
+                    <a:bodyPr/>
+                    <a:lstStyle/>
+                    <a:p>
+                      <a:pPr algn="l"/>
+                      <a:endParaRPr lang="ru-RU" sz="2400" dirty="0">
+                        <a:latin typeface="Times New Roman" panose="02020603050405020304" pitchFamily="18" charset="0"/>
+                        <a:cs typeface="Times New Roman" panose="02020603050405020304" pitchFamily="18" charset="0"/>
+                      </a:endParaRPr>
+                    </a:p>
+                  </a:txBody>
+                  <a:tcPr/>
+                </a:tc>
+                <a:extLst>
+                  <a:ext uri="{0D108BD9-81ED-4DB2-BD59-A6C34878D82A}">
+                    <a16:rowId xmlns:a16="http://schemas.microsoft.com/office/drawing/2014/main" val="3874804075"/>
+                  </a:ext>
+                </a:extLst>
+              </a:tr>
+            </a:tbl>
+          </a:graphicData>
+        </a:graphic>
+      </p:graphicFrame>
+      <p:pic>
+        <p:nvPicPr>
+          <p:cNvPr id="5" name="Рисунок 4">
+            <a:extLst>
+              <a:ext uri="{FF2B5EF4-FFF2-40B4-BE49-F238E27FC236}">
+                <a16:creationId xmlns:a16="http://schemas.microsoft.com/office/drawing/2014/main" id="{1D56C587-8140-A4D2-A098-A67A0128271E}"/>
+              </a:ext>
+            </a:extLst>
+          </p:cNvPr>
+          <p:cNvPicPr>
+            <a:picLocks noChangeAspect="1"/>
+          </p:cNvPicPr>
+          <p:nvPr/>
+        </p:nvPicPr>
+        <p:blipFill>
+          <a:blip r:embed="rId3"/>
+          <a:stretch>
+            <a:fillRect/>
+          </a:stretch>
+        </p:blipFill>
+        <p:spPr>
+          <a:xfrm>
+            <a:off x="5950374" y="1259975"/>
+            <a:ext cx="4650410" cy="1257277"/>
+          </a:xfrm>
+          <a:prstGeom prst="rect">
+            <a:avLst/>
+          </a:prstGeom>
+          <a:ln w="127000" cap="sq">
+            <a:solidFill>
+              <a:srgbClr val="000000"/>
+            </a:solidFill>
+            <a:miter lim="800000"/>
+          </a:ln>
+          <a:effectLst>
+            <a:outerShdw blurRad="57150" dist="50800" dir="2700000" algn="tl" rotWithShape="0">
+              <a:srgbClr val="000000">
+                <a:alpha val="40000"/>
+              </a:srgbClr>
+            </a:outerShdw>
+          </a:effectLst>
+        </p:spPr>
+      </p:pic>
+      <p:pic>
+        <p:nvPicPr>
+          <p:cNvPr id="11" name="Рисунок 10">
+            <a:extLst>
+              <a:ext uri="{FF2B5EF4-FFF2-40B4-BE49-F238E27FC236}">
+                <a16:creationId xmlns:a16="http://schemas.microsoft.com/office/drawing/2014/main" id="{BFDD08AF-E994-8DC7-5319-D7562E1DDD3C}"/>
+              </a:ext>
+            </a:extLst>
+          </p:cNvPr>
+          <p:cNvPicPr>
+            <a:picLocks noChangeAspect="1"/>
+          </p:cNvPicPr>
+          <p:nvPr/>
+        </p:nvPicPr>
+        <p:blipFill>
+          <a:blip r:embed="rId4"/>
+          <a:stretch>
+            <a:fillRect/>
+          </a:stretch>
+        </p:blipFill>
+        <p:spPr>
+          <a:xfrm>
+            <a:off x="6963307" y="2181504"/>
+            <a:ext cx="4894990" cy="869204"/>
+          </a:xfrm>
+          <a:prstGeom prst="rect">
+            <a:avLst/>
+          </a:prstGeom>
+          <a:solidFill>
+            <a:srgbClr val="FFFFFF">
+              <a:shade val="85000"/>
+            </a:srgbClr>
+          </a:solidFill>
+          <a:ln w="190500" cap="sq">
+            <a:solidFill>
+              <a:srgbClr val="FFFFFF"/>
+            </a:solidFill>
+            <a:miter lim="800000"/>
+          </a:ln>
+          <a:effectLst>
+            <a:outerShdw blurRad="55000" dist="18000" dir="5400000" algn="tl" rotWithShape="0">
+              <a:srgbClr val="000000">
+                <a:alpha val="40000"/>
+              </a:srgbClr>
+            </a:outerShdw>
+          </a:effectLst>
+          <a:scene3d>
+            <a:camera prst="orthographicFront"/>
+            <a:lightRig rig="twoPt" dir="t">
+              <a:rot lat="0" lon="0" rev="7200000"/>
+            </a:lightRig>
+          </a:scene3d>
+          <a:sp3d>
+            <a:bevelT w="25400" h="19050"/>
+            <a:contourClr>
+              <a:srgbClr val="FFFFFF"/>
+            </a:contourClr>
+          </a:sp3d>
+        </p:spPr>
+      </p:pic>
+      <p:pic>
+        <p:nvPicPr>
+          <p:cNvPr id="13" name="Рисунок 12">
+            <a:extLst>
+              <a:ext uri="{FF2B5EF4-FFF2-40B4-BE49-F238E27FC236}">
+                <a16:creationId xmlns:a16="http://schemas.microsoft.com/office/drawing/2014/main" id="{6FDDC009-5720-3B41-0716-A1989EA5FCA8}"/>
+              </a:ext>
+            </a:extLst>
+          </p:cNvPr>
+          <p:cNvPicPr>
+            <a:picLocks noChangeAspect="1"/>
+          </p:cNvPicPr>
+          <p:nvPr/>
+        </p:nvPicPr>
+        <p:blipFill>
+          <a:blip r:embed="rId5"/>
+          <a:stretch>
+            <a:fillRect/>
+          </a:stretch>
+        </p:blipFill>
+        <p:spPr>
+          <a:xfrm>
+            <a:off x="3935626" y="3334708"/>
+            <a:ext cx="6773609" cy="914142"/>
+          </a:xfrm>
+          <a:prstGeom prst="rect">
+            <a:avLst/>
+          </a:prstGeom>
+          <a:ln w="127000" cap="sq">
+            <a:solidFill>
+              <a:srgbClr val="000000"/>
+            </a:solidFill>
+            <a:miter lim="800000"/>
+          </a:ln>
+          <a:effectLst>
+            <a:outerShdw blurRad="57150" dist="50800" dir="2700000" algn="tl" rotWithShape="0">
+              <a:srgbClr val="000000">
+                <a:alpha val="40000"/>
+              </a:srgbClr>
+            </a:outerShdw>
+          </a:effectLst>
+        </p:spPr>
+      </p:pic>
+      <p:pic>
+        <p:nvPicPr>
+          <p:cNvPr id="15" name="Рисунок 14">
+            <a:extLst>
+              <a:ext uri="{FF2B5EF4-FFF2-40B4-BE49-F238E27FC236}">
+                <a16:creationId xmlns:a16="http://schemas.microsoft.com/office/drawing/2014/main" id="{8216D7DB-5F3C-42EF-9C44-6E188426C0FF}"/>
+              </a:ext>
+            </a:extLst>
+          </p:cNvPr>
+          <p:cNvPicPr>
+            <a:picLocks noChangeAspect="1"/>
+          </p:cNvPicPr>
+          <p:nvPr/>
+        </p:nvPicPr>
+        <p:blipFill>
+          <a:blip r:embed="rId6"/>
+          <a:stretch>
+            <a:fillRect/>
+          </a:stretch>
+        </p:blipFill>
+        <p:spPr>
+          <a:xfrm>
+            <a:off x="4343400" y="4633331"/>
+            <a:ext cx="7260094" cy="1413469"/>
+          </a:xfrm>
+          <a:prstGeom prst="round2DiagRect">
+            <a:avLst>
+              <a:gd name="adj1" fmla="val 16667"/>
+              <a:gd name="adj2" fmla="val 0"/>
+            </a:avLst>
+          </a:prstGeom>
+          <a:ln w="88900" cap="sq">
+            <a:solidFill>
+              <a:srgbClr val="FFFFFF"/>
+            </a:solidFill>
+            <a:miter lim="800000"/>
+          </a:ln>
+          <a:effectLst>
+            <a:outerShdw blurRad="254000" algn="tl" rotWithShape="0">
+              <a:srgbClr val="000000">
+                <a:alpha val="43000"/>
+              </a:srgbClr>
+            </a:outerShdw>
+          </a:effectLst>
+        </p:spPr>
+      </p:pic>
+    </p:spTree>
+    <p:extLst>
+      <p:ext uri="{BB962C8B-B14F-4D97-AF65-F5344CB8AC3E}">
+        <p14:creationId xmlns:p14="http://schemas.microsoft.com/office/powerpoint/2010/main" val="4108350450"/>
       </p:ext>
     </p:extLst>
   </p:cSld>

--- a/Морской бой на C++.pptx
+++ b/Морской бой на C++.pptx
@@ -11,6 +11,7 @@
     <p:sldId id="259" r:id="rId5"/>
     <p:sldId id="261" r:id="rId6"/>
     <p:sldId id="260" r:id="rId7"/>
+    <p:sldId id="262" r:id="rId8"/>
   </p:sldIdLst>
   <p:sldSz cx="12192000" cy="6858000"/>
   <p:notesSz cx="6858000" cy="9144000"/>
@@ -3118,7 +3119,37 @@
                 <a:latin typeface="Times New Roman" panose="02020603050405020304" pitchFamily="18" charset="0"/>
                 <a:cs typeface="Times New Roman" panose="02020603050405020304" pitchFamily="18" charset="0"/>
               </a:rPr>
-              <a:t>Участники: Кириченко И.А. </a:t>
+              <a:t>Участники: Кириченко </a:t>
+            </a:r>
+            <a:r>
+              <a:rPr lang="ru-RU" sz="2800">
+                <a:solidFill>
+                  <a:schemeClr val="bg1"/>
+                </a:solidFill>
+                <a:latin typeface="Times New Roman" panose="02020603050405020304" pitchFamily="18" charset="0"/>
+                <a:cs typeface="Times New Roman" panose="02020603050405020304" pitchFamily="18" charset="0"/>
+              </a:rPr>
+              <a:t>И</a:t>
+            </a:r>
+            <a:r>
+              <a:rPr lang="ru-RU" sz="2800" smtClean="0">
+                <a:solidFill>
+                  <a:schemeClr val="bg1"/>
+                </a:solidFill>
+                <a:latin typeface="Times New Roman" panose="02020603050405020304" pitchFamily="18" charset="0"/>
+                <a:cs typeface="Times New Roman" panose="02020603050405020304" pitchFamily="18" charset="0"/>
+              </a:rPr>
+              <a:t>. А</a:t>
+            </a:r>
+            <a:r>
+              <a:rPr lang="ru-RU" sz="2800" dirty="0">
+                <a:solidFill>
+                  <a:schemeClr val="bg1"/>
+                </a:solidFill>
+                <a:latin typeface="Times New Roman" panose="02020603050405020304" pitchFamily="18" charset="0"/>
+                <a:cs typeface="Times New Roman" panose="02020603050405020304" pitchFamily="18" charset="0"/>
+              </a:rPr>
+              <a:t>. </a:t>
             </a:r>
           </a:p>
           <a:p>
@@ -3154,7 +3185,7 @@
               <a:t>П</a:t>
             </a:r>
             <a:r>
-              <a:rPr lang="en-US" sz="2800" dirty="0">
+              <a:rPr lang="en-US" sz="2800" dirty="0" smtClean="0">
                 <a:solidFill>
                   <a:schemeClr val="bg1"/>
                 </a:solidFill>
@@ -3164,15 +3195,35 @@
               <a:t>.</a:t>
             </a:r>
             <a:r>
-              <a:rPr lang="ru-RU" sz="2800" dirty="0">
+              <a:rPr lang="ru-RU" sz="2800" dirty="0" smtClean="0">
                 <a:solidFill>
                   <a:schemeClr val="bg1"/>
                 </a:solidFill>
                 <a:latin typeface="Times New Roman" panose="02020603050405020304" pitchFamily="18" charset="0"/>
                 <a:cs typeface="Times New Roman" panose="02020603050405020304" pitchFamily="18" charset="0"/>
               </a:rPr>
-              <a:t>Н</a:t>
-            </a:r>
+              <a:t> Н. </a:t>
+            </a:r>
+          </a:p>
+          <a:p>
+            <a:pPr algn="l"/>
+            <a:r>
+              <a:rPr lang="ru-RU" sz="2800" dirty="0" smtClean="0">
+                <a:solidFill>
+                  <a:schemeClr val="bg1"/>
+                </a:solidFill>
+                <a:latin typeface="Times New Roman" panose="02020603050405020304" pitchFamily="18" charset="0"/>
+                <a:cs typeface="Times New Roman" panose="02020603050405020304" pitchFamily="18" charset="0"/>
+              </a:rPr>
+              <a:t>Ситков Д. Н.</a:t>
+            </a:r>
+            <a:endParaRPr lang="ru-RU" sz="2800" dirty="0">
+              <a:solidFill>
+                <a:schemeClr val="bg1"/>
+              </a:solidFill>
+              <a:latin typeface="Times New Roman" panose="02020603050405020304" pitchFamily="18" charset="0"/>
+              <a:cs typeface="Times New Roman" panose="02020603050405020304" pitchFamily="18" charset="0"/>
+            </a:endParaRPr>
           </a:p>
           <a:p>
             <a:pPr algn="l"/>
@@ -3236,6 +3287,13 @@
   <p:clrMapOvr>
     <a:masterClrMapping/>
   </p:clrMapOvr>
+  <p:timing>
+    <p:tnLst>
+      <p:par>
+        <p:cTn id="1" dur="indefinite" restart="never" nodeType="tmRoot"/>
+      </p:par>
+    </p:tnLst>
+  </p:timing>
 </p:sld>
 </file>
 
@@ -3708,6 +3766,13 @@
   <p:clrMapOvr>
     <a:masterClrMapping/>
   </p:clrMapOvr>
+  <p:timing>
+    <p:tnLst>
+      <p:par>
+        <p:cTn id="1" dur="indefinite" restart="never" nodeType="tmRoot"/>
+      </p:par>
+    </p:tnLst>
+  </p:timing>
 </p:sld>
 </file>
 
@@ -3841,7 +3906,7 @@
           <p:nvPr>
             <p:extLst>
               <p:ext uri="{D42A27DB-BD31-4B8C-83A1-F6EECF244321}">
-                <p14:modId xmlns:p14="http://schemas.microsoft.com/office/powerpoint/2010/main" val="4256519509"/>
+                <p14:modId xmlns:p14="http://schemas.microsoft.com/office/powerpoint/2010/main" val="1737101964"/>
               </p:ext>
             </p:extLst>
           </p:nvPr>
@@ -3984,17 +4049,27 @@
                           <a:latin typeface="Times New Roman" panose="02020603050405020304" pitchFamily="18" charset="0"/>
                           <a:cs typeface="Times New Roman" panose="02020603050405020304" pitchFamily="18" charset="0"/>
                         </a:rPr>
-                        <a:t>Синхронизация (мьютексы</a:t>
+                        <a:t>Синхронизация </a:t>
                       </a:r>
                       <a:r>
-                        <a:rPr lang="en-US" sz="2400" dirty="0">
+                        <a:rPr lang="ru-RU" sz="2400" dirty="0" smtClean="0">
                           <a:solidFill>
                             <a:schemeClr val="bg1"/>
                           </a:solidFill>
                           <a:latin typeface="Times New Roman" panose="02020603050405020304" pitchFamily="18" charset="0"/>
                           <a:cs typeface="Times New Roman" panose="02020603050405020304" pitchFamily="18" charset="0"/>
                         </a:rPr>
-                        <a:t>/</a:t>
+                        <a:t>(</a:t>
+                      </a:r>
+                      <a:r>
+                        <a:rPr lang="ru-RU" sz="2400" dirty="0" err="1" smtClean="0">
+                          <a:solidFill>
+                            <a:schemeClr val="bg1"/>
+                          </a:solidFill>
+                          <a:latin typeface="Times New Roman" panose="02020603050405020304" pitchFamily="18" charset="0"/>
+                          <a:cs typeface="Times New Roman" panose="02020603050405020304" pitchFamily="18" charset="0"/>
+                        </a:rPr>
+                        <a:t>ивенты</a:t>
                       </a:r>
                       <a:r>
                         <a:rPr lang="ru-RU" sz="2400" dirty="0">
@@ -4004,7 +4079,7 @@
                           <a:latin typeface="Times New Roman" panose="02020603050405020304" pitchFamily="18" charset="0"/>
                           <a:cs typeface="Times New Roman" panose="02020603050405020304" pitchFamily="18" charset="0"/>
                         </a:rPr>
-                        <a:t>ивенты)</a:t>
+                        <a:t>)</a:t>
                       </a:r>
                     </a:p>
                   </a:txBody>
@@ -4131,6 +4206,13 @@
   <p:clrMapOvr>
     <a:masterClrMapping/>
   </p:clrMapOvr>
+  <p:timing>
+    <p:tnLst>
+      <p:par>
+        <p:cTn id="1" dur="indefinite" restart="never" nodeType="tmRoot"/>
+      </p:par>
+    </p:tnLst>
+  </p:timing>
 </p:sld>
 </file>
 
@@ -4222,119 +4304,6 @@
           </a:p>
         </p:txBody>
       </p:sp>
-      <p:sp>
-        <p:nvSpPr>
-          <p:cNvPr id="4" name="Текст 3"/>
-          <p:cNvSpPr>
-            <a:spLocks noGrp="1"/>
-          </p:cNvSpPr>
-          <p:nvPr>
-            <p:ph type="body" sz="half" idx="2"/>
-          </p:nvPr>
-        </p:nvSpPr>
-        <p:spPr>
-          <a:xfrm>
-            <a:off x="0" y="7064485"/>
-            <a:ext cx="5297214" cy="3403819"/>
-          </a:xfrm>
-          <a:noFill/>
-          <a:ln w="9525" cap="flat" cmpd="sng" algn="ctr">
-            <a:solidFill>
-              <a:schemeClr val="accent4"/>
-            </a:solidFill>
-            <a:prstDash val="solid"/>
-            <a:round/>
-            <a:headEnd type="none" w="med" len="med"/>
-            <a:tailEnd type="none" w="med" len="med"/>
-          </a:ln>
-        </p:spPr>
-        <p:style>
-          <a:lnRef idx="0">
-            <a:scrgbClr r="0" g="0" b="0"/>
-          </a:lnRef>
-          <a:fillRef idx="0">
-            <a:scrgbClr r="0" g="0" b="0"/>
-          </a:fillRef>
-          <a:effectRef idx="0">
-            <a:scrgbClr r="0" g="0" b="0"/>
-          </a:effectRef>
-          <a:fontRef idx="minor">
-            <a:schemeClr val="accent4"/>
-          </a:fontRef>
-        </p:style>
-        <p:txBody>
-          <a:bodyPr>
-            <a:normAutofit/>
-          </a:bodyPr>
-          <a:lstStyle/>
-          <a:p>
-            <a:pPr marL="342900" indent="-342900">
-              <a:buFont typeface="Arial" panose="020B0604020202020204" pitchFamily="34" charset="0"/>
-              <a:buChar char="•"/>
-            </a:pPr>
-            <a:r>
-              <a:rPr lang="ru-RU" sz="2400" dirty="0">
-                <a:solidFill>
-                  <a:schemeClr val="bg1"/>
-                </a:solidFill>
-                <a:latin typeface="Times New Roman" panose="02020603050405020304" pitchFamily="18" charset="0"/>
-                <a:cs typeface="Times New Roman" panose="02020603050405020304" pitchFamily="18" charset="0"/>
-              </a:rPr>
-              <a:t>Реализовал хранение поле через массив указателей</a:t>
-            </a:r>
-          </a:p>
-          <a:p>
-            <a:endParaRPr lang="ru-RU" sz="2400" dirty="0">
-              <a:solidFill>
-                <a:schemeClr val="bg1"/>
-              </a:solidFill>
-              <a:latin typeface="Times New Roman" panose="02020603050405020304" pitchFamily="18" charset="0"/>
-              <a:cs typeface="Times New Roman" panose="02020603050405020304" pitchFamily="18" charset="0"/>
-            </a:endParaRPr>
-          </a:p>
-          <a:p>
-            <a:pPr marL="342900" indent="-342900">
-              <a:buFont typeface="Arial" panose="020B0604020202020204" pitchFamily="34" charset="0"/>
-              <a:buChar char="•"/>
-            </a:pPr>
-            <a:r>
-              <a:rPr lang="ru-RU" sz="2400" dirty="0">
-                <a:solidFill>
-                  <a:schemeClr val="bg1"/>
-                </a:solidFill>
-                <a:latin typeface="Times New Roman" panose="02020603050405020304" pitchFamily="18" charset="0"/>
-                <a:cs typeface="Times New Roman" panose="02020603050405020304" pitchFamily="18" charset="0"/>
-              </a:rPr>
-              <a:t>Организовал динамическое создание кораблей</a:t>
-            </a:r>
-          </a:p>
-          <a:p>
-            <a:endParaRPr lang="ru-RU" sz="2400" dirty="0">
-              <a:solidFill>
-                <a:schemeClr val="bg1"/>
-              </a:solidFill>
-              <a:latin typeface="Times New Roman" panose="02020603050405020304" pitchFamily="18" charset="0"/>
-              <a:cs typeface="Times New Roman" panose="02020603050405020304" pitchFamily="18" charset="0"/>
-            </a:endParaRPr>
-          </a:p>
-          <a:p>
-            <a:pPr marL="342900" indent="-342900">
-              <a:buFont typeface="Arial" panose="020B0604020202020204" pitchFamily="34" charset="0"/>
-              <a:buChar char="•"/>
-            </a:pPr>
-            <a:r>
-              <a:rPr lang="ru-RU" sz="2400" dirty="0">
-                <a:solidFill>
-                  <a:schemeClr val="bg1"/>
-                </a:solidFill>
-                <a:latin typeface="Times New Roman" panose="02020603050405020304" pitchFamily="18" charset="0"/>
-                <a:cs typeface="Times New Roman" panose="02020603050405020304" pitchFamily="18" charset="0"/>
-              </a:rPr>
-              <a:t>Реализовал деструктор для освобождения памяти</a:t>
-            </a:r>
-          </a:p>
-        </p:txBody>
-      </p:sp>
       <p:graphicFrame>
         <p:nvGraphicFramePr>
           <p:cNvPr id="6" name="Таблица 5"/>
@@ -4344,7 +4313,7 @@
           <p:nvPr>
             <p:extLst>
               <p:ext uri="{D42A27DB-BD31-4B8C-83A1-F6EECF244321}">
-                <p14:modId xmlns:p14="http://schemas.microsoft.com/office/powerpoint/2010/main" val="3998894801"/>
+                <p14:modId xmlns:p14="http://schemas.microsoft.com/office/powerpoint/2010/main" val="3547688932"/>
               </p:ext>
             </p:extLst>
           </p:nvPr>
@@ -4406,7 +4375,27 @@
                           <a:latin typeface="Times New Roman" panose="02020603050405020304" pitchFamily="18" charset="0"/>
                           <a:cs typeface="Times New Roman" panose="02020603050405020304" pitchFamily="18" charset="0"/>
                         </a:rPr>
-                        <a:t>Хранение поле через массив указателей</a:t>
+                        <a:t>Хранение </a:t>
+                      </a:r>
+                      <a:r>
+                        <a:rPr lang="ru-RU" sz="2400" dirty="0" smtClean="0">
+                          <a:solidFill>
+                            <a:schemeClr val="bg1"/>
+                          </a:solidFill>
+                          <a:latin typeface="Times New Roman" panose="02020603050405020304" pitchFamily="18" charset="0"/>
+                          <a:cs typeface="Times New Roman" panose="02020603050405020304" pitchFamily="18" charset="0"/>
+                        </a:rPr>
+                        <a:t>поля </a:t>
+                      </a:r>
+                      <a:r>
+                        <a:rPr lang="ru-RU" sz="2400" dirty="0">
+                          <a:solidFill>
+                            <a:schemeClr val="bg1"/>
+                          </a:solidFill>
+                          <a:latin typeface="Times New Roman" panose="02020603050405020304" pitchFamily="18" charset="0"/>
+                          <a:cs typeface="Times New Roman" panose="02020603050405020304" pitchFamily="18" charset="0"/>
+                        </a:rPr>
+                        <a:t>через массив указателей</a:t>
                       </a:r>
                     </a:p>
                     <a:p>
@@ -4586,7 +4575,7 @@
         </p:blipFill>
         <p:spPr>
           <a:xfrm>
-            <a:off x="6910684" y="1942458"/>
+            <a:off x="6908056" y="1608080"/>
             <a:ext cx="4130298" cy="452133"/>
           </a:xfrm>
           <a:prstGeom prst="rect">
@@ -4610,7 +4599,7 @@
         </p:blipFill>
         <p:spPr>
           <a:xfrm>
-            <a:off x="6093371" y="3005622"/>
+            <a:off x="6093371" y="2742607"/>
             <a:ext cx="5759668" cy="658224"/>
           </a:xfrm>
           <a:prstGeom prst="rect">
@@ -4652,6 +4641,13 @@
   <p:clrMapOvr>
     <a:masterClrMapping/>
   </p:clrMapOvr>
+  <p:timing>
+    <p:tnLst>
+      <p:par>
+        <p:cTn id="1" dur="indefinite" restart="never" nodeType="tmRoot"/>
+      </p:par>
+    </p:tnLst>
+  </p:timing>
 </p:sld>
 </file>
 
@@ -4698,8 +4694,8 @@
         </p:nvSpPr>
         <p:spPr>
           <a:xfrm>
-            <a:off x="662152" y="220719"/>
-            <a:ext cx="4852112" cy="916103"/>
+            <a:off x="333703" y="409427"/>
+            <a:ext cx="3925614" cy="774215"/>
           </a:xfrm>
           <a:solidFill>
             <a:schemeClr val="accent6">
@@ -4732,15 +4728,42 @@
           <a:p>
             <a:pPr algn="just"/>
             <a:r>
-              <a:rPr lang="ru-RU" sz="5400" dirty="0">
+              <a:rPr lang="ru-RU" sz="3600" dirty="0" smtClean="0">
                 <a:solidFill>
                   <a:schemeClr val="bg1"/>
                 </a:solidFill>
                 <a:latin typeface="Times New Roman" panose="02020603050405020304" pitchFamily="18" charset="0"/>
                 <a:cs typeface="Times New Roman" panose="02020603050405020304" pitchFamily="18" charset="0"/>
               </a:rPr>
-              <a:t>Реализация боя</a:t>
-            </a:r>
+              <a:t>Реализация</a:t>
+            </a:r>
+            <a:r>
+              <a:rPr lang="en-US" sz="5400" dirty="0">
+                <a:solidFill>
+                  <a:schemeClr val="bg1"/>
+                </a:solidFill>
+                <a:latin typeface="Times New Roman" panose="02020603050405020304" pitchFamily="18" charset="0"/>
+                <a:cs typeface="Times New Roman" panose="02020603050405020304" pitchFamily="18" charset="0"/>
+              </a:rPr>
+              <a:t> </a:t>
+            </a:r>
+            <a:r>
+              <a:rPr lang="ru-RU" sz="3600" dirty="0" smtClean="0">
+                <a:solidFill>
+                  <a:schemeClr val="bg1"/>
+                </a:solidFill>
+                <a:latin typeface="Times New Roman" panose="02020603050405020304" pitchFamily="18" charset="0"/>
+                <a:cs typeface="Times New Roman" panose="02020603050405020304" pitchFamily="18" charset="0"/>
+              </a:rPr>
+              <a:t>боя</a:t>
+            </a:r>
+            <a:endParaRPr lang="ru-RU" sz="3600" dirty="0">
+              <a:solidFill>
+                <a:schemeClr val="bg1"/>
+              </a:solidFill>
+              <a:latin typeface="Times New Roman" panose="02020603050405020304" pitchFamily="18" charset="0"/>
+              <a:cs typeface="Times New Roman" panose="02020603050405020304" pitchFamily="18" charset="0"/>
+            </a:endParaRPr>
           </a:p>
         </p:txBody>
       </p:sp>
@@ -4753,7 +4776,7 @@
           <p:nvPr>
             <p:extLst>
               <p:ext uri="{D42A27DB-BD31-4B8C-83A1-F6EECF244321}">
-                <p14:modId xmlns:p14="http://schemas.microsoft.com/office/powerpoint/2010/main" val="4294721690"/>
+                <p14:modId xmlns:p14="http://schemas.microsoft.com/office/powerpoint/2010/main" val="2885749690"/>
               </p:ext>
             </p:extLst>
           </p:nvPr>
@@ -4808,16 +4831,26 @@
                         <a:defRPr/>
                       </a:pPr>
                       <a:r>
-                        <a:rPr lang="ru-RU" sz="2400" b="1" dirty="0">
+                        <a:rPr lang="ru-RU" sz="2400" b="0" dirty="0" smtClean="0">
                           <a:solidFill>
                             <a:schemeClr val="bg1"/>
                           </a:solidFill>
                           <a:latin typeface="Times New Roman" panose="02020603050405020304" pitchFamily="18" charset="0"/>
                           <a:cs typeface="Times New Roman" panose="02020603050405020304" pitchFamily="18" charset="0"/>
                         </a:rPr>
-                        <a:t>обработка выстрела</a:t>
+                        <a:t>Обработка </a:t>
                       </a:r>
-                      <a:endParaRPr lang="ru-RU" sz="2400" b="1" dirty="0">
+                      <a:r>
+                        <a:rPr lang="ru-RU" sz="2400" b="0" dirty="0">
+                          <a:solidFill>
+                            <a:schemeClr val="bg1"/>
+                          </a:solidFill>
+                          <a:latin typeface="Times New Roman" panose="02020603050405020304" pitchFamily="18" charset="0"/>
+                          <a:cs typeface="Times New Roman" panose="02020603050405020304" pitchFamily="18" charset="0"/>
+                        </a:rPr>
+                        <a:t>выстрела</a:t>
+                      </a:r>
+                      <a:endParaRPr lang="ru-RU" sz="2400" b="0" dirty="0">
                         <a:latin typeface="Times New Roman" panose="02020603050405020304" pitchFamily="18" charset="0"/>
                         <a:cs typeface="Times New Roman" panose="02020603050405020304" pitchFamily="18" charset="0"/>
                       </a:endParaRPr>
@@ -4831,7 +4864,7 @@
                     <a:lstStyle/>
                     <a:p>
                       <a:pPr algn="l"/>
-                      <a:endParaRPr lang="ru-RU" sz="2400" dirty="0">
+                      <a:endParaRPr lang="ru-RU" sz="2400" b="0" dirty="0">
                         <a:latin typeface="Times New Roman" panose="02020603050405020304" pitchFamily="18" charset="0"/>
                         <a:cs typeface="Times New Roman" panose="02020603050405020304" pitchFamily="18" charset="0"/>
                       </a:endParaRPr>
@@ -4869,14 +4902,34 @@
                         <a:defRPr/>
                       </a:pPr>
                       <a:r>
-                        <a:rPr lang="ru-RU" sz="2400" b="1" dirty="0">
+                        <a:rPr lang="ru-RU" sz="2400" b="0" dirty="0">
                           <a:solidFill>
                             <a:schemeClr val="bg1"/>
                           </a:solidFill>
                           <a:latin typeface="Times New Roman" panose="02020603050405020304" pitchFamily="18" charset="0"/>
                           <a:cs typeface="Times New Roman" panose="02020603050405020304" pitchFamily="18" charset="0"/>
                         </a:rPr>
-                        <a:t>добивание бота</a:t>
+                        <a:t>Д</a:t>
+                      </a:r>
+                      <a:r>
+                        <a:rPr lang="ru-RU" sz="2400" b="0" dirty="0" smtClean="0">
+                          <a:solidFill>
+                            <a:schemeClr val="bg1"/>
+                          </a:solidFill>
+                          <a:latin typeface="Times New Roman" panose="02020603050405020304" pitchFamily="18" charset="0"/>
+                          <a:cs typeface="Times New Roman" panose="02020603050405020304" pitchFamily="18" charset="0"/>
+                        </a:rPr>
+                        <a:t>обивание </a:t>
+                      </a:r>
+                      <a:r>
+                        <a:rPr lang="ru-RU" sz="2400" b="0" dirty="0">
+                          <a:solidFill>
+                            <a:schemeClr val="bg1"/>
+                          </a:solidFill>
+                          <a:latin typeface="Times New Roman" panose="02020603050405020304" pitchFamily="18" charset="0"/>
+                          <a:cs typeface="Times New Roman" panose="02020603050405020304" pitchFamily="18" charset="0"/>
+                        </a:rPr>
+                        <a:t>бота</a:t>
                       </a:r>
                     </a:p>
                   </a:txBody>
@@ -4888,7 +4941,7 @@
                     <a:lstStyle/>
                     <a:p>
                       <a:pPr algn="l"/>
-                      <a:endParaRPr lang="ru-RU" sz="2400" dirty="0">
+                      <a:endParaRPr lang="ru-RU" sz="2400" b="0" dirty="0">
                         <a:latin typeface="Times New Roman" panose="02020603050405020304" pitchFamily="18" charset="0"/>
                         <a:cs typeface="Times New Roman" panose="02020603050405020304" pitchFamily="18" charset="0"/>
                       </a:endParaRPr>
@@ -4926,16 +4979,26 @@
                         <a:defRPr/>
                       </a:pPr>
                       <a:r>
-                        <a:rPr lang="ru-RU" sz="2400" b="1" dirty="0">
+                        <a:rPr lang="ru-RU" sz="2400" b="0" dirty="0" smtClean="0">
                           <a:solidFill>
                             <a:schemeClr val="bg1"/>
                           </a:solidFill>
                           <a:latin typeface="Times New Roman" panose="02020603050405020304" pitchFamily="18" charset="0"/>
                           <a:cs typeface="Times New Roman" panose="02020603050405020304" pitchFamily="18" charset="0"/>
                         </a:rPr>
-                        <a:t>потопление корабля</a:t>
+                        <a:t>Потопление </a:t>
                       </a:r>
-                      <a:endParaRPr lang="ru-RU" sz="2400" b="1" dirty="0">
+                      <a:r>
+                        <a:rPr lang="ru-RU" sz="2400" b="0" dirty="0">
+                          <a:solidFill>
+                            <a:schemeClr val="bg1"/>
+                          </a:solidFill>
+                          <a:latin typeface="Times New Roman" panose="02020603050405020304" pitchFamily="18" charset="0"/>
+                          <a:cs typeface="Times New Roman" panose="02020603050405020304" pitchFamily="18" charset="0"/>
+                        </a:rPr>
+                        <a:t>корабля</a:t>
+                      </a:r>
+                      <a:endParaRPr lang="ru-RU" sz="2400" b="0" dirty="0">
                         <a:latin typeface="Times New Roman" panose="02020603050405020304" pitchFamily="18" charset="0"/>
                         <a:cs typeface="Times New Roman" panose="02020603050405020304" pitchFamily="18" charset="0"/>
                       </a:endParaRPr>
@@ -4949,7 +5012,7 @@
                     <a:lstStyle/>
                     <a:p>
                       <a:pPr algn="l"/>
-                      <a:endParaRPr lang="ru-RU" sz="2400" dirty="0">
+                      <a:endParaRPr lang="ru-RU" sz="2400" b="0" dirty="0">
                         <a:latin typeface="Times New Roman" panose="02020603050405020304" pitchFamily="18" charset="0"/>
                         <a:cs typeface="Times New Roman" panose="02020603050405020304" pitchFamily="18" charset="0"/>
                       </a:endParaRPr>
@@ -5171,6 +5234,13 @@
   <p:clrMapOvr>
     <a:masterClrMapping/>
   </p:clrMapOvr>
+  <p:timing>
+    <p:tnLst>
+      <p:par>
+        <p:cTn id="1" dur="indefinite" restart="never" nodeType="tmRoot"/>
+      </p:par>
+    </p:tnLst>
+  </p:timing>
 </p:sld>
 </file>
 
@@ -5229,7 +5299,7 @@
         </p:nvSpPr>
         <p:spPr>
           <a:xfrm>
-            <a:off x="55606" y="43249"/>
+            <a:off x="333703" y="362618"/>
             <a:ext cx="4637256" cy="1581665"/>
           </a:xfrm>
           <a:solidFill>
@@ -5262,22 +5332,18 @@
           <a:lstStyle/>
           <a:p>
             <a:r>
-              <a:rPr lang="ru-RU" sz="3600" b="1" dirty="0">
+              <a:rPr lang="ru-RU" sz="3600" dirty="0">
                 <a:solidFill>
-                  <a:schemeClr val="accent4">
-                    <a:lumMod val="60000"/>
-                    <a:lumOff val="40000"/>
-                  </a:schemeClr>
+                  <a:schemeClr val="bg1"/>
                 </a:solidFill>
+                <a:latin typeface="Times New Roman" panose="02020603050405020304" pitchFamily="18" charset="0"/>
+                <a:cs typeface="Times New Roman" panose="02020603050405020304" pitchFamily="18" charset="0"/>
               </a:rPr>
               <a:t>Реализация многопоточности и синхронизация ходов</a:t>
             </a:r>
             <a:endParaRPr lang="ru-RU" sz="4000" dirty="0">
               <a:solidFill>
-                <a:schemeClr val="accent4">
-                  <a:lumMod val="60000"/>
-                  <a:lumOff val="40000"/>
-                </a:schemeClr>
+                <a:schemeClr val="bg1"/>
               </a:solidFill>
               <a:latin typeface="Times New Roman" panose="02020603050405020304" pitchFamily="18" charset="0"/>
               <a:cs typeface="Times New Roman" panose="02020603050405020304" pitchFamily="18" charset="0"/>
@@ -5300,7 +5366,7 @@
           <p:nvPr>
             <p:extLst>
               <p:ext uri="{D42A27DB-BD31-4B8C-83A1-F6EECF244321}">
-                <p14:modId xmlns:p14="http://schemas.microsoft.com/office/powerpoint/2010/main" val="2752925848"/>
+                <p14:modId xmlns:p14="http://schemas.microsoft.com/office/powerpoint/2010/main" val="3427419531"/>
               </p:ext>
             </p:extLst>
           </p:nvPr>
@@ -5355,18 +5421,18 @@
                         <a:defRPr/>
                       </a:pPr>
                       <a:r>
-                        <a:rPr lang="ru-RU" sz="2400" b="1" i="0" kern="1200" dirty="0">
+                        <a:rPr lang="ru-RU" sz="2400" b="0" i="0" kern="1200" dirty="0">
                           <a:solidFill>
                             <a:schemeClr val="bg1"/>
                           </a:solidFill>
                           <a:effectLst/>
-                          <a:latin typeface="+mn-lt"/>
+                          <a:latin typeface="Times New Roman" panose="02020603050405020304" pitchFamily="18" charset="0"/>
                           <a:ea typeface="+mn-ea"/>
-                          <a:cs typeface="+mn-cs"/>
+                          <a:cs typeface="Times New Roman" panose="02020603050405020304" pitchFamily="18" charset="0"/>
                         </a:rPr>
                         <a:t>Разделение логики на независимые потоки</a:t>
                       </a:r>
-                      <a:endParaRPr lang="ru-RU" sz="3200" b="1" dirty="0">
+                      <a:endParaRPr lang="ru-RU" sz="3200" b="0" dirty="0">
                         <a:solidFill>
                           <a:schemeClr val="bg1"/>
                         </a:solidFill>
@@ -5383,7 +5449,7 @@
                     <a:lstStyle/>
                     <a:p>
                       <a:pPr algn="l"/>
-                      <a:endParaRPr lang="ru-RU" sz="2400" dirty="0">
+                      <a:endParaRPr lang="ru-RU" sz="2400" b="0" dirty="0">
                         <a:latin typeface="Times New Roman" panose="02020603050405020304" pitchFamily="18" charset="0"/>
                         <a:cs typeface="Times New Roman" panose="02020603050405020304" pitchFamily="18" charset="0"/>
                       </a:endParaRPr>
@@ -5421,18 +5487,18 @@
                         <a:defRPr/>
                       </a:pPr>
                       <a:r>
-                        <a:rPr lang="ru-RU" sz="2400" b="1" i="0" kern="1200" dirty="0">
+                        <a:rPr lang="ru-RU" sz="2400" b="0" i="0" kern="1200" dirty="0">
                           <a:solidFill>
                             <a:schemeClr val="bg1"/>
                           </a:solidFill>
                           <a:effectLst/>
-                          <a:latin typeface="+mn-lt"/>
+                          <a:latin typeface="Times New Roman" panose="02020603050405020304" pitchFamily="18" charset="0"/>
                           <a:ea typeface="+mn-ea"/>
-                          <a:cs typeface="+mn-cs"/>
+                          <a:cs typeface="Times New Roman" panose="02020603050405020304" pitchFamily="18" charset="0"/>
                         </a:rPr>
                         <a:t>Блокировка потока</a:t>
                       </a:r>
-                      <a:endParaRPr lang="ru-RU" sz="3200" b="1" dirty="0">
+                      <a:endParaRPr lang="ru-RU" sz="3200" b="0" dirty="0">
                         <a:solidFill>
                           <a:schemeClr val="bg1"/>
                         </a:solidFill>
@@ -5449,7 +5515,7 @@
                     <a:lstStyle/>
                     <a:p>
                       <a:pPr algn="l"/>
-                      <a:endParaRPr lang="ru-RU" sz="2400" dirty="0">
+                      <a:endParaRPr lang="ru-RU" sz="2400" b="0" dirty="0">
                         <a:latin typeface="Times New Roman" panose="02020603050405020304" pitchFamily="18" charset="0"/>
                         <a:cs typeface="Times New Roman" panose="02020603050405020304" pitchFamily="18" charset="0"/>
                       </a:endParaRPr>
@@ -5487,18 +5553,18 @@
                         <a:defRPr/>
                       </a:pPr>
                       <a:r>
-                        <a:rPr lang="ru-RU" sz="2400" b="1" i="0" kern="1200" dirty="0">
+                        <a:rPr lang="ru-RU" sz="2400" b="0" i="0" kern="1200" dirty="0">
                           <a:solidFill>
                             <a:schemeClr val="bg1"/>
                           </a:solidFill>
                           <a:effectLst/>
-                          <a:latin typeface="+mn-lt"/>
+                          <a:latin typeface="Times New Roman" panose="02020603050405020304" pitchFamily="18" charset="0"/>
                           <a:ea typeface="+mn-ea"/>
-                          <a:cs typeface="+mn-cs"/>
+                          <a:cs typeface="Times New Roman" panose="02020603050405020304" pitchFamily="18" charset="0"/>
                         </a:rPr>
                         <a:t>Передача управления</a:t>
                       </a:r>
-                      <a:endParaRPr lang="ru-RU" sz="3200" b="1" dirty="0">
+                      <a:endParaRPr lang="ru-RU" sz="3200" b="0" dirty="0">
                         <a:solidFill>
                           <a:schemeClr val="bg1"/>
                         </a:solidFill>
@@ -5515,7 +5581,7 @@
                     <a:lstStyle/>
                     <a:p>
                       <a:pPr algn="l"/>
-                      <a:endParaRPr lang="ru-RU" sz="2400" dirty="0">
+                      <a:endParaRPr lang="ru-RU" sz="2400" b="0" dirty="0">
                         <a:latin typeface="Times New Roman" panose="02020603050405020304" pitchFamily="18" charset="0"/>
                         <a:cs typeface="Times New Roman" panose="02020603050405020304" pitchFamily="18" charset="0"/>
                       </a:endParaRPr>
@@ -5555,7 +5621,7 @@
         </p:blipFill>
         <p:spPr>
           <a:xfrm>
-            <a:off x="5950374" y="1259975"/>
+            <a:off x="6312980" y="1153450"/>
             <a:ext cx="4650410" cy="1257277"/>
           </a:xfrm>
           <a:prstGeom prst="rect">
@@ -5598,7 +5664,7 @@
         </p:blipFill>
         <p:spPr>
           <a:xfrm>
-            <a:off x="6963307" y="2181504"/>
+            <a:off x="6832678" y="2163908"/>
             <a:ext cx="4894990" cy="869204"/>
           </a:xfrm>
           <a:prstGeom prst="rect">
@@ -5735,6 +5801,64 @@
   <p:clrMapOvr>
     <a:masterClrMapping/>
   </p:clrMapOvr>
+  <p:timing>
+    <p:tnLst>
+      <p:par>
+        <p:cTn id="1" dur="indefinite" restart="never" nodeType="tmRoot"/>
+      </p:par>
+    </p:tnLst>
+  </p:timing>
+</p:sld>
+</file>
+
+<file path=ppt/slides/slide7.xml><?xml version="1.0" encoding="utf-8"?>
+<p:sld xmlns:a="http://schemas.openxmlformats.org/drawingml/2006/main" xmlns:r="http://schemas.openxmlformats.org/officeDocument/2006/relationships" xmlns:p="http://schemas.openxmlformats.org/presentationml/2006/main">
+  <p:cSld>
+    <p:bg>
+      <p:bgPr>
+        <a:blipFill dpi="0" rotWithShape="1">
+          <a:blip r:embed="rId2">
+            <a:lum/>
+          </a:blip>
+          <a:srcRect/>
+          <a:stretch>
+            <a:fillRect/>
+          </a:stretch>
+        </a:blipFill>
+        <a:effectLst/>
+      </p:bgPr>
+    </p:bg>
+    <p:spTree>
+      <p:nvGrpSpPr>
+        <p:cNvPr id="1" name=""/>
+        <p:cNvGrpSpPr/>
+        <p:nvPr/>
+      </p:nvGrpSpPr>
+      <p:grpSpPr>
+        <a:xfrm>
+          <a:off x="0" y="0"/>
+          <a:ext cx="0" cy="0"/>
+          <a:chOff x="0" y="0"/>
+          <a:chExt cx="0" cy="0"/>
+        </a:xfrm>
+      </p:grpSpPr>
+    </p:spTree>
+    <p:extLst>
+      <p:ext uri="{BB962C8B-B14F-4D97-AF65-F5344CB8AC3E}">
+        <p14:creationId xmlns:p14="http://schemas.microsoft.com/office/powerpoint/2010/main" val="1998416595"/>
+      </p:ext>
+    </p:extLst>
+  </p:cSld>
+  <p:clrMapOvr>
+    <a:masterClrMapping/>
+  </p:clrMapOvr>
+  <p:timing>
+    <p:tnLst>
+      <p:par>
+        <p:cTn id="1" dur="indefinite" restart="never" nodeType="tmRoot"/>
+      </p:par>
+    </p:tnLst>
+  </p:timing>
 </p:sld>
 </file>
 
